--- a/v2/research/editable/single/11_editable_stage_comparison.pptx
+++ b/v2/research/editable/single/11_editable_stage_comparison.pptx
@@ -2,13 +2,13 @@
 <file path=ppt/presentation.xml><?xml version="1.0" encoding="utf-8"?>
 <p:presentation xmlns:p="http://schemas.openxmlformats.org/presentationml/2006/main">
   <p:sldMasterIdLst>
-    <p:sldMasterId xmlns:r="http://schemas.openxmlformats.org/officeDocument/2006/relationships" id="2147483648" r:id="Ra2afa85c4357413b"/>
+    <p:sldMasterId xmlns:r="http://schemas.openxmlformats.org/officeDocument/2006/relationships" id="2147483648" r:id="Rc72817cacb5a468a"/>
   </p:sldMasterIdLst>
   <p:notesMasterIdLst>
-    <p:notesMasterId xmlns:r="http://schemas.openxmlformats.org/officeDocument/2006/relationships" r:id="Rddebb8f3659b43fb"/>
+    <p:notesMasterId xmlns:r="http://schemas.openxmlformats.org/officeDocument/2006/relationships" r:id="R5462fe4358f4494c"/>
   </p:notesMasterIdLst>
   <p:sldIdLst>
-    <p:sldId xmlns:r="http://schemas.openxmlformats.org/officeDocument/2006/relationships" id="256" r:id="Rf77f8b9d1f43465a"/>
+    <p:sldId xmlns:r="http://schemas.openxmlformats.org/officeDocument/2006/relationships" id="256" r:id="Re55103daf9a9474a"/>
   </p:sldIdLst>
   <p:sldSz cx="18288000" cy="10287000"/>
   <p:notesSz cx="6858000" cy="9144000"/>
@@ -442,7 +442,907 @@
           <a:lstStyle xmlns:a="http://schemas.openxmlformats.org/drawingml/2006/main"/>
           <a:p xmlns:a="http://schemas.openxmlformats.org/drawingml/2006/main">
             <a:r>
-              <a:t>Source: user-provided stage comparison screenshot, supplied 12 October 2026. All stage counts are illustrative assumptions, not researched empirical cohort statistics. Denominator: per one clinical entrant. The separate reference funnel uses per approved drug and is used only for its visual form; its numbers are not mixed into this comparison. Virtual design is not literally free. DNA-encoded libraries are not equivalent to fully characterized discrete compounds; construction counts are conceptual. Approved ~0.14 is an expected count, not a measured probability established by this deck. Clinical benefit and approval rates in the AI era are unknown. Icon: Lucide flask-conical, ISC license, https://github.com/lucide-icons/lucide.</a:t>
+              <a:t>Reviewed 13 October 2026. Workflow units differ by modality; no synthetic per-clinical-entrant molecule counts are used. Historical Phase I-to-approval estimates are separate cohorts and methods. Measurement-workload sensitivities are inputs, not candidate-count forecasts.</a:t>
+            </a:r>
+          </a:p>
+          <a:p xmlns:a="http://schemas.openxmlformats.org/drawingml/2006/main">
+            <a:r>
+              <a:t/>
+            </a:r>
+          </a:p>
+          <a:p xmlns:a="http://schemas.openxmlformats.org/drawingml/2006/main">
+            <a:r>
+              <a:t># Evidence review and implemented corrections</a:t>
+            </a:r>
+          </a:p>
+          <a:p xmlns:a="http://schemas.openxmlformats.org/drawingml/2006/main">
+            <a:r>
+              <a:t/>
+            </a:r>
+          </a:p>
+          <a:p xmlns:a="http://schemas.openxmlformats.org/drawingml/2006/main">
+            <a:r>
+              <a:t>Reviewed 13 October 2026. The website, affected figures and their PPT/PDF exports distinguish verified quotations from independently measured markets, analyst scenarios and unresolved source checks. The investment thesis is conditional on funded experiments and supplier orders.</a:t>
+            </a:r>
+          </a:p>
+          <a:p xmlns:a="http://schemas.openxmlformats.org/drawingml/2006/main">
+            <a:r>
+              <a:t/>
+            </a:r>
+          </a:p>
+          <a:p xmlns:a="http://schemas.openxmlformats.org/drawingml/2006/main">
+            <a:r>
+              <a:t>## Implemented changes</a:t>
+            </a:r>
+          </a:p>
+          <a:p xmlns:a="http://schemas.openxmlformats.org/drawingml/2006/main">
+            <a:r>
+              <a:t/>
+            </a:r>
+          </a:p>
+          <a:p xmlns:a="http://schemas.openxmlformats.org/drawingml/2006/main">
+            <a:r>
+              <a:t>- Figures 11–12 and the interactive funnel no longer present universal pre-AI/AI molecule counts or a synthetic cohort per clinical entrant. The page distinguishes small molecules from proteins/antibodies and uses 1× / 2× / 5× / 10× measurement-workload sensitivities. These are model inputs, not forecasts of fully profiled candidates.</a:t>
+            </a:r>
+          </a:p>
+          <a:p xmlns:a="http://schemas.openxmlformats.org/drawingml/2006/main">
+            <a:r>
+              <a:t>- Figure 03 replaces unsupported customer spending percentages with a qualitative product-use map. Research hospitals are explicit. Food, environmental and industrial-chemical uses are outside this life-science scope; clinical IVD analyzers are not included in research-instrument examples.</a:t>
+            </a:r>
+          </a:p>
+          <a:p xmlns:a="http://schemas.openxmlformats.org/drawingml/2006/main">
+            <a:r>
+              <a:t>- Figure 06 and the calculator separate physical quantities from spending. Price ratios, usable wells and reagent overhead are explicit scenario inputs.</a:t>
+            </a:r>
+          </a:p>
+          <a:p xmlns:a="http://schemas.openxmlformats.org/drawingml/2006/main">
+            <a:r>
+              <a:t>- Figure 07 replaces the unsupported 100% funding allocation with hypothetical total funding × 5% / 10% / 20% tool-purchase capture. These are cumulative sensitivities without a fixed horizon, not observed capital raised, vendor orders or annual TAM.</a:t>
+            </a:r>
+          </a:p>
+          <a:p xmlns:a="http://schemas.openxmlformats.org/drawingml/2006/main">
+            <a:r>
+              <a:t>- Figure 02 retains the quoted F&amp;S values and correct arithmetic but labels the issuer-commissioned scope. The China/global ratio is not multinational suppliers’ China revenue exposure.</a:t>
+            </a:r>
+          </a:p>
+          <a:p xmlns:a="http://schemas.openxmlformats.org/drawingml/2006/main">
+            <a:r>
+              <a:t>- Figure 12 retains the source-confirmed supplier/ticker map, labels recombinant-protein market disagreement and withholds the two Duoning headline market values pending source recovery.</a:t>
+            </a:r>
+          </a:p>
+          <a:p xmlns:a="http://schemas.openxmlformats.org/drawingml/2006/main">
+            <a:r>
+              <a:t/>
+            </a:r>
+          </a:p>
+          <a:p xmlns:a="http://schemas.openxmlformats.org/drawingml/2006/main">
+            <a:r>
+              <a:t>## Market quotations and remaining limitations</a:t>
+            </a:r>
+          </a:p>
+          <a:p xmlns:a="http://schemas.openxmlformats.org/drawingml/2006/main">
+            <a:r>
+              <a:t/>
+            </a:r>
+          </a:p>
+          <a:p xmlns:a="http://schemas.openxmlformats.org/drawingml/2006/main">
+            <a:r>
+              <a:t>### Four quoted anchors checked against their primary issuer documents</a:t>
+            </a:r>
+          </a:p>
+          <a:p xmlns:a="http://schemas.openxmlformats.org/drawingml/2006/main">
+            <a:r>
+              <a:t/>
+            </a:r>
+          </a:p>
+          <a:p xmlns:a="http://schemas.openxmlformats.org/drawingml/2006/main">
+            <a:r>
+              <a:t>1. China DNA-synthesis services, 2025: RMB1.33bn = RMB0.53bn oligonucleotide services + RMB0.80bn long-fragment services. Equipment, molecular reagents and sequencing are excluded. Tsingke prospectus, printed 1-1-158 / PDF159. [Primary filing](https://static.sse.com.cn/stock/disclosure/announcement/c/202606/002233_20260630_Z9LA.pdf).</a:t>
+            </a:r>
+          </a:p>
+          <a:p xmlns:a="http://schemas.openxmlformats.org/drawingml/2006/main">
+            <a:r>
+              <a:t>2. Global research-grade recombinant-protein reagents, 2025: US$3.5bn; China approximately US$0.4bn. ACRO filing, printed p.71 / PDF80. The issuer commissioned F&amp;S for RMB530,000, disclosed on printed p.63 / PDF72. This confirms the quotation and commissioning, not independent market measurement. [Primary filing](https://www1.hkexnews.hk/app/sehk/2026/108910/documents/sehk26093002651_c.pdf).</a:t>
+            </a:r>
+          </a:p>
+          <a:p xmlns:a="http://schemas.openxmlformats.org/drawingml/2006/main">
+            <a:r>
+              <a:t>3. China disposable plastic biological laboratory consumables, 2024: approximately RMB23bn. JET Biofil’s annual-report summary, PDF6, cites industry research. The broad scope includes research, clinical and industrial applications. A constant CAGR extrapolated from 2020 is not an independent validation. [Primary disclosure](https://static.cninfo.com.cn/finalpage/2026-04-30/1225255989.PDF).</a:t>
+            </a:r>
+          </a:p>
+          <a:p xmlns:a="http://schemas.openxmlformats.org/drawingml/2006/main">
+            <a:r>
+              <a:t>4. China sequencing instruments and consumables, 2024: RMB4.3bn. MGI annual report, pp.41–42, cites CIC/company/conference sources. The total includes clinical applications and does not size LC-MS, flow or imaging. Summing selected issuers’ China revenues is not a market check without harmonized product and geography definitions. [Primary disclosure](https://static.cninfo.com.cn/finalpage/2025-04-30/1223427376.PDF).</a:t>
+            </a:r>
+          </a:p>
+          <a:p xmlns:a="http://schemas.openxmlformats.org/drawingml/2006/main">
+            <a:r>
+              <a:t/>
+            </a:r>
+          </a:p>
+          <a:p xmlns:a="http://schemas.openxmlformats.org/drawingml/2006/main">
+            <a:r>
+              <a:t>### Protein estimates disagree; no harmonized range</a:t>
+            </a:r>
+          </a:p>
+          <a:p xmlns:a="http://schemas.openxmlformats.org/drawingml/2006/main">
+            <a:r>
+              <a:t/>
+            </a:r>
+          </a:p>
+          <a:p xmlns:a="http://schemas.openxmlformats.org/drawingml/2006/main">
+            <a:r>
+              <a:t>- F&amp;S/ACRO: US$3.5bn in 2025 for research-grade protein reagents, issuer commissioned.</a:t>
+            </a:r>
+          </a:p>
+          <a:p xmlns:a="http://schemas.openxmlformats.org/drawingml/2006/main">
+            <a:r>
+              <a:t>- MarketsandMarkets: US$1.11bn in 2026 for finished off-the-shelf research-use protein consumables. [Original release](https://www.marketsandmarkets.com/PressReleases/research-use-recombinant-protein.asp), [scope definition](https://www.marketsandmarkets.com/Market-Reports/research-use-recombinant-protein-market-156810846.html).</a:t>
+            </a:r>
+          </a:p>
+          <a:p xmlns:a="http://schemas.openxmlformats.org/drawingml/2006/main">
+            <a:r>
+              <a:t>- Global Market Insights: approximately US$2.5bn in 2025 for broader protein inputs and outsourced production services, including therapeutic and diagnostic uses. [Original report page](https://www.gminsights.com/industry-analysis/recombinant-proteins-market).</a:t>
+            </a:r>
+          </a:p>
+          <a:p xmlns:a="http://schemas.openxmlformats.org/drawingml/2006/main">
+            <a:r>
+              <a:t/>
+            </a:r>
+          </a:p>
+          <a:p xmlns:a="http://schemas.openxmlformats.org/drawingml/2006/main">
+            <a:r>
+              <a:t>Different years, product boundaries and methods prevent treating these figures as endpoints of a confidence interval. The disagreement warrants lower confidence in absolute TAM. It does not by itself prove F&amp;S inflated the market or identify one correct number. The source-specific historical series is not spliced with alternative providers.</a:t>
+            </a:r>
+          </a:p>
+          <a:p xmlns:a="http://schemas.openxmlformats.org/drawingml/2006/main">
+            <a:r>
+              <a:t/>
+            </a:r>
+          </a:p>
+          <a:p xmlns:a="http://schemas.openxmlformats.org/drawingml/2006/main">
+            <a:r>
+              <a:t>### Duoning values withheld from headlines</a:t>
+            </a:r>
+          </a:p>
+          <a:p xmlns:a="http://schemas.openxmlformats.org/drawingml/2006/main">
+            <a:r>
+              <a:t/>
+            </a:r>
+          </a:p>
+          <a:p xmlns:a="http://schemas.openxmlformats.org/drawingml/2006/main">
+            <a:r>
+              <a:t>Previous source notes cited China 2024 bioprocess media US$323.5m and bioprocess resins US$578.2m from the January2026 Duoning application, printed pp.126 and132. Its original Chinese and English full PDFs return404. The official index marks the application lapsed and no longer exposes full download links. Values and detailed exclusions have not been directly reverified in this review. They remain in source history as unverified prior citations, while headline cards and the funnel show “Source pending.” A search excerpt, derivative report, or assumed Protein A share does not restore original verification. [Official application index](https://www1.hkexnews.hk/app/appyearlyindex.html?lang=en&amp;year=2026).</a:t>
+            </a:r>
+          </a:p>
+          <a:p xmlns:a="http://schemas.openxmlformats.org/drawingml/2006/main">
+            <a:r>
+              <a:t/>
+            </a:r>
+          </a:p>
+          <a:p xmlns:a="http://schemas.openxmlformats.org/drawingml/2006/main">
+            <a:r>
+              <a:t>### Figure 02 uses one F&amp;S definition</a:t>
+            </a:r>
+          </a:p>
+          <a:p xmlns:a="http://schemas.openxmlformats.org/drawingml/2006/main">
+            <a:r>
+              <a:t/>
+            </a:r>
+          </a:p>
+          <a:p xmlns:a="http://schemas.openxmlformats.org/drawingml/2006/main">
+            <a:r>
+              <a:t>Quoted 2025 global/China LST estimates are US$41.5bn / US$7.7bn; research biological reagents US$26.4bn / US$4.6bn. Residual other tools are US$15.1bn / US$3.1bn. China/global = 7.7 /41.5 =18.554%, rounded18.6%. The residual is calculated and has not been split independently into instruments and consumables. Source: ACRO filing, printed pp.64–65 and67; commissioning p.63. Much larger broad tools/services estimates have different boundaries. Those boundaries have not been reconciled, and neither a broad-market alternative nor Western issuer geography percentages are replacement denominators.</a:t>
+            </a:r>
+          </a:p>
+          <a:p xmlns:a="http://schemas.openxmlformats.org/drawingml/2006/main">
+            <a:r>
+              <a:t/>
+            </a:r>
+          </a:p>
+          <a:p xmlns:a="http://schemas.openxmlformats.org/drawingml/2006/main">
+            <a:r>
+              <a:t>## Workflow and clinical evidence</a:t>
+            </a:r>
+          </a:p>
+          <a:p xmlns:a="http://schemas.openxmlformats.org/drawingml/2006/main">
+            <a:r>
+              <a:t/>
+            </a:r>
+          </a:p>
+          <a:p xmlns:a="http://schemas.openxmlformats.org/drawingml/2006/main">
+            <a:r>
+              <a:t>- Classical docking evaluated170 million compounds in2019 and synthesized/tested44 and549 for two targets. This is a study-level example, not a clinical-entrant cohort. [Lyu et al., Nature2019](https://www.nature.com/articles/s41586-019-0917-9).</a:t>
+            </a:r>
+          </a:p>
+          <a:p xmlns:a="http://schemas.openxmlformats.org/drawingml/2006/main">
+            <a:r>
+              <a:t>- A classical docking platform screened approximately1.3 billion compounds in2020. “Pre-AI” is not a universal cutoff; the distinction is method and workflow. [Gorgulla et al., Nature2020](https://pmc.ncbi.nlm.nih.gov/articles/PMC8352709/).</a:t>
+            </a:r>
+          </a:p>
+          <a:p xmlns:a="http://schemas.openxmlformats.org/drawingml/2006/main">
+            <a:r>
+              <a:t>- DSP-1181 was the350th compound synthesized in one company-reported program. [Sumitomo technical report2021, PDF4](https://www.sumitomo-chem.co.jp/english/rd/report/2021E_3.pdf).</a:t>
+            </a:r>
+          </a:p>
+          <a:p xmlns:a="http://schemas.openxmlformats.org/drawingml/2006/main">
+            <a:r>
+              <a:t>- REC-617 optimization synthesized136 novel compounds, according to company reporting. This is not a controlled industry-wide comparison. [Recursion2024 annual report](https://www.sec.gov/Archives/edgar/data/1601830/000160183025000064/rxrxannualreport2024.pdf).</a:t>
+            </a:r>
+          </a:p>
+          <a:p xmlns:a="http://schemas.openxmlformats.org/drawingml/2006/main">
+            <a:r>
+              <a:t>- Insilico’s78-molecule statement is company-reported and not used as a generic funnel parameter. The78 in a prominent Nature trial description refers to participants; these units must not be confused. [Company case study](https://insilico.com/casestudy).</a:t>
+            </a:r>
+          </a:p>
+          <a:p xmlns:a="http://schemas.openxmlformats.org/drawingml/2006/main">
+            <a:r>
+              <a:t>- Pooled protein screens and purified individual profiles are distinct. Bennett et al. screened approximately80,000 pooled designs then confirmed selected binders individually; substantial pooled protein screening also existed in2017. [Bennett et al.2023](https://www.nature.com/articles/s41467-023-38328-5), [Chevalier et al.2017](https://www.nature.com/articles/nature23912).</a:t>
+            </a:r>
+          </a:p>
+          <a:p xmlns:a="http://schemas.openxmlformats.org/drawingml/2006/main">
+            <a:r>
+              <a:t>- BIO’s7.9% Phase I-to-approval estimate covers2011–2020. Wong et al.’s13.8% covers2000–2015 with different data/methods. The two-study span is not a confidence interval, current consensus or an AI comparison. Neither is an expected output of the removed synthetic funnel. [BIO report](https://go.bio.org/rs/490-EHZ-999/images/ClinicalDevelopmentSuccessRates2011_2020.pdf), [Wong et al.](https://doi.org/10.1093/biostatistics/kxx069).</a:t>
+            </a:r>
+          </a:p>
+          <a:p xmlns:a="http://schemas.openxmlformats.org/drawingml/2006/main">
+            <a:r>
+              <a:t/>
+            </a:r>
+          </a:p>
+          <a:p xmlns:a="http://schemas.openxmlformats.org/drawingml/2006/main">
+            <a:r>
+              <a:t>## Unit-economics calculations</a:t>
+            </a:r>
+          </a:p>
+          <a:p xmlns:a="http://schemas.openxmlformats.org/drawingml/2006/main">
+            <a:r>
+              <a:t/>
+            </a:r>
+          </a:p>
+          <a:p xmlns:a="http://schemas.openxmlformats.org/drawingml/2006/main">
+            <a:r>
+              <a:t>Baseline:100,000 tests ×100µL =10L; ceil(100,000 /96)=1,042 destination plates;100,000 tips at1/test.</a:t>
+            </a:r>
+          </a:p>
+          <a:p xmlns:a="http://schemas.openxmlformats.org/drawingml/2006/main">
+            <a:r>
+              <a:t/>
+            </a:r>
+          </a:p>
+          <a:p xmlns:a="http://schemas.openxmlformats.org/drawingml/2006/main">
+            <a:r>
+              <a:t>Example:1,000,000 tests ×5µL =5L; ceil(1,000,000 /1,536)=652 destination plates;100,000 tips at0.1/test.</a:t>
+            </a:r>
+          </a:p>
+          <a:p xmlns:a="http://schemas.openxmlformats.org/drawingml/2006/main">
+            <a:r>
+              <a:t/>
+            </a:r>
+          </a:p>
+          <a:p xmlns:a="http://schemas.openxmlformats.org/drawingml/2006/main">
+            <a:r>
+              <a:t>Plate-count ratio =652/1,042 =0.625720. Plate-spend ratio =0.625720 × comparable plate ASP ratio. Break-even ASP =1,042/652 =1.598160. At1×/2×/4× ASP, spend ratios are0.625720 /1.251440 /2.502879. These price multipliers are scenario inputs, not vendor quotes. The review’s “plastic spend probably rises” is not established without equivalent product quotes and consumption scope.</a:t>
+            </a:r>
+          </a:p>
+          <a:p xmlns:a="http://schemas.openxmlformats.org/drawingml/2006/main">
+            <a:r>
+              <a:t/>
+            </a:r>
+          </a:p>
+          <a:p xmlns:a="http://schemas.openxmlformats.org/drawingml/2006/main">
+            <a:r>
+              <a:t>Calculator reagent volume =tests ×usable assay µL ×(1 + case-specific extra-reagent overhead)/1,000,000. The baseline uses its own overhead input. New destination plates =ceil(tests /floor(wells ×usable-well fraction)); baseline plates assume100% usable wells. Price ratios multiply quantity ratios separately for reagent, plate and tip spend. Real workflows can also require source plates, reservoirs, controls, retests and instrument capital. [Beckman’s source-container and dead-volume documentation](https://www.beckman.com/supplies/echo-qualified-supplies). Average tips/test is a model input, not a recommendation to reuse biological-sample tips.</a:t>
+            </a:r>
+          </a:p>
+          <a:p xmlns:a="http://schemas.openxmlformats.org/drawingml/2006/main">
+            <a:r>
+              <a:t/>
+            </a:r>
+          </a:p>
+          <a:p xmlns:a="http://schemas.openxmlformats.org/drawingml/2006/main">
+            <a:r>
+              <a:t>Funding scenarios:US$50/100/200bn ×5%/10%/20% capture imply cumulative tool purchases of [2.5,5,10] / [5,10,20] / [10,20,40] US$bn. No fixed time horizon or empirical capture share is asserted. Exclude labor, clinical execution, compute/data/software, facilities and funding not spent on tools. CRO fees and embedded vendor-input purchases must not be added together. [Recursion2025 10-K](https://www.sec.gov/Archives/edgar/data/1601830/000160183026000039/rxrx-20251231.htm), pp.147–148, illustrates diverse R&amp;D cost categories, not universal cash shares.</a:t>
+            </a:r>
+          </a:p>
+          <a:p xmlns:a="http://schemas.openxmlformats.org/drawingml/2006/main">
+            <a:r>
+              <a:t/>
+            </a:r>
+          </a:p>
+          <a:p xmlns:a="http://schemas.openxmlformats.org/drawingml/2006/main">
+            <a:r>
+              <a:t>An incremental equipment budget need not resemble the composition of existing annual tool sales. The reviewer’s30% equipment versus64% market-reagents comparison alone is not an arithmetic contradiction. Unsupported allocation shares were removed because their evidential basis was missing.</a:t>
+            </a:r>
+          </a:p>
+          <a:p xmlns:a="http://schemas.openxmlformats.org/drawingml/2006/main">
+            <a:r>
+              <a:t/>
+            </a:r>
+          </a:p>
+          <a:p xmlns:a="http://schemas.openxmlformats.org/drawingml/2006/main">
+            <a:r>
+              <a:t>## Current sequencing-policy correction</a:t>
+            </a:r>
+          </a:p>
+          <a:p xmlns:a="http://schemas.openxmlformats.org/drawingml/2006/main">
+            <a:r>
+              <a:t/>
+            </a:r>
+          </a:p>
+          <a:p xmlns:a="http://schemas.openxmlformats.org/drawingml/2006/main">
+            <a:r>
+              <a:t>China’s blanket Illumina sequencer-export prohibition introduced on4March2025 ended on10November2025. Illumina remained on the Unreliable Entity List and instrument purchases required government approval, confirmed in its2026-filed annual report. The reviewer’s ongoing blanket-ban statement is outdated. The2024 anchor remains a dated source estimate rather than a current policy-adjusted TAM. [Illumina announcement](https://www.illumina.com/company/news-center/press-releases/2025/97cd0e7b-b018-4ab8-beb0-0f538b164ae6.html), [MOFCOM update](https://exportcontrol.mofcom.gov.cn/article/gndt/202511/1187.html), [2025 annual report filed2026](https://www.sec.gov/Archives/edgar/data/1110803/000111080326000024/ilmn-20251228.htm).</a:t>
+            </a:r>
+          </a:p>
+          <a:p xmlns:a="http://schemas.openxmlformats.org/drawingml/2006/main">
+            <a:r>
+              <a:t/>
+            </a:r>
+          </a:p>
+          <a:p xmlns:a="http://schemas.openxmlformats.org/drawingml/2006/main">
+            <a:r>
+              <a:t>BD/Waters ownership and verified supplier tickers remain as previously sourced in palette/TICKER_SOURCES.md. This review does not establish any supplier’s AI-attributable revenue, market share or valuation upside.</a:t>
+            </a:r>
+          </a:p>
+          <a:p xmlns:a="http://schemas.openxmlformats.org/drawingml/2006/main">
+            <a:r>
+              <a:t/>
+            </a:r>
+          </a:p>
+          <a:p xmlns:a="http://schemas.openxmlformats.org/drawingml/2006/main">
+            <a:r>
+              <a:t/>
+            </a:r>
+          </a:p>
+          <a:p xmlns:a="http://schemas.openxmlformats.org/drawingml/2006/main">
+            <a:r>
+              <a:t>## Superseded source history</a:t>
+            </a:r>
+          </a:p>
+          <a:p xmlns:a="http://schemas.openxmlformats.org/drawingml/2006/main">
+            <a:r>
+              <a:t/>
+            </a:r>
+          </a:p>
+          <a:p xmlns:a="http://schemas.openxmlformats.org/drawingml/2006/main">
+            <a:r>
+              <a:t>The following preserves prior citation history. Its universal molecule counts, customer-percentage assumptions, funding allocation and Duoning headline figures were superseded by the review above and must not be used as current inputs.</a:t>
+            </a:r>
+          </a:p>
+          <a:p xmlns:a="http://schemas.openxmlformats.org/drawingml/2006/main">
+            <a:r>
+              <a:t/>
+            </a:r>
+          </a:p>
+          <a:p xmlns:a="http://schemas.openxmlformats.org/drawingml/2006/main">
+            <a:r>
+              <a:t># Sources, assumptions and market boundaries</a:t>
+            </a:r>
+          </a:p>
+          <a:p xmlns:a="http://schemas.openxmlformats.org/drawingml/2006/main">
+            <a:r>
+              <a:t/>
+            </a:r>
+          </a:p>
+          <a:p xmlns:a="http://schemas.openxmlformats.org/drawingml/2006/main">
+            <a:r>
+              <a:t>Research date: 12 October 2026. This package visualizes the supplied research framework and selected anchors from the preceding primary-source research. Historical industry numbers are consultant or company-cited estimates, rather than administrative census measurements.</a:t>
+            </a:r>
+          </a:p>
+          <a:p xmlns:a="http://schemas.openxmlformats.org/drawingml/2006/main">
+            <a:r>
+              <a:t/>
+            </a:r>
+          </a:p>
+          <a:p xmlns:a="http://schemas.openxmlformats.org/drawingml/2006/main">
+            <a:r>
+              <a:t>## Stage table and funnel</a:t>
+            </a:r>
+          </a:p>
+          <a:p xmlns:a="http://schemas.openxmlformats.org/drawingml/2006/main">
+            <a:r>
+              <a:t/>
+            </a:r>
+          </a:p>
+          <a:p xmlns:a="http://schemas.openxmlformats.org/drawingml/2006/main">
+            <a:r>
+              <a:t>The supplied stage table uses virtual designs ~1,000 before AI versus 100,000–1 billion in the AI scenario; physical candidates ~1,000 versus 1,000–10,000; wet-lab profiling ~50 versus an illustrative 50→500 expansion; clinical entry 1 versus 1; expected approvals ~0.14 versus unknown. These are user-supplied assumptions, not empirical cohort statistics.</a:t>
+            </a:r>
+          </a:p>
+          <a:p xmlns:a="http://schemas.openxmlformats.org/drawingml/2006/main">
+            <a:r>
+              <a:t/>
+            </a:r>
+          </a:p>
+          <a:p xmlns:a="http://schemas.openxmlformats.org/drawingml/2006/main">
+            <a:r>
+              <a:t>The denominator is one clinical entrant. The second reference image uses a different denominator, per approved drug; its counts are not mixed into this table. ~0.14 is an illustrative expected count, not an independently validated success probability. DNA-encoded libraries are not equivalent to fully characterized discrete candidates. Virtual design has costs and quality constraints. The diagram states a working capacity-gate hypothesis, not that design quality or clinical biology cease to matter.</a:t>
+            </a:r>
+          </a:p>
+          <a:p xmlns:a="http://schemas.openxmlformats.org/drawingml/2006/main">
+            <a:r>
+              <a:t/>
+            </a:r>
+          </a:p>
+          <a:p xmlns:a="http://schemas.openxmlformats.org/drawingml/2006/main">
+            <a:r>
+              <a:t>## Market anchors in the enlarged ecosystem</a:t>
+            </a:r>
+          </a:p>
+          <a:p xmlns:a="http://schemas.openxmlformats.org/drawingml/2006/main">
+            <a:r>
+              <a:t/>
+            </a:r>
+          </a:p>
+          <a:p xmlns:a="http://schemas.openxmlformats.org/drawingml/2006/main">
+            <a:r>
+              <a:t>| Anchor | Geography / year | Value | Scope and evidence |</a:t>
+            </a:r>
+          </a:p>
+          <a:p xmlns:a="http://schemas.openxmlformats.org/drawingml/2006/main">
+            <a:r>
+              <a:t>|---|---|---|---|</a:t>
+            </a:r>
+          </a:p>
+          <a:p xmlns:a="http://schemas.openxmlformats.org/drawingml/2006/main">
+            <a:r>
+              <a:t>| DNA synthesis services | China / 2025 | RMB1.33bn | Oligonucleotide RMB0.53bn + long-fragment RMB0.80bn. Midstream services only. Tsingke 2026 IPO filing, pp.156–158. [Primary filing](https://static.sse.com.cn/stock/disclosure/announcement/c/202606/002233_20260630_Z9LA.pdf). |</a:t>
+            </a:r>
+          </a:p>
+          <a:p xmlns:a="http://schemas.openxmlformats.org/drawingml/2006/main">
+            <a:r>
+              <a:t>| Research-use recombinant proteins | Global / 2025 | US$3.5bn | Research use; not therapeutic protein manufacturing. China ~US$0.4bn is rounded to US$0.1bn precision. ACROBiosystems 2026 HKEX application, printed p.71 / PDF p.80. [Primary filing](https://www1.hkexnews.hk/app/sehk/2026/108910/documents/sehk26093002651_c.pdf). |</a:t>
+            </a:r>
+          </a:p>
+          <a:p xmlns:a="http://schemas.openxmlformats.org/drawingml/2006/main">
+            <a:r>
+              <a:t>| Bioprocess culture media | China / 2024 | US$323.5m* | Selected media market; not all cellular tools. F&amp;S in Duoning 2026 filing, printed p.126. Excludes the COVID impact on vaccine products. [Filing URL](https://www.hkexnews.hk/app/sehk/2026/108106/documents/sehk26011800033_c.pdf). |</a:t>
+            </a:r>
+          </a:p>
+          <a:p xmlns:a="http://schemas.openxmlformats.org/drawingml/2006/main">
+            <a:r>
+              <a:t>| Disposable plastic biological laboratory consumables | China / 2024 | ~RMB23bn | Includes research, clinical and industrial uses. JET Biofil 2025 annual-report summary, PDF p.6; company cites F&amp;S and industry research. Direct primary PDF rechecked on 12 Oct 2026. [Primary disclosure](https://static.cninfo.com.cn/finalpage/2026-04-30/1225255989.PDF). |</a:t>
+            </a:r>
+          </a:p>
+          <a:p xmlns:a="http://schemas.openxmlformats.org/drawingml/2006/main">
+            <a:r>
+              <a:t>| Sequencing instruments and consumables | China / 2024 | RMB4.3bn | Includes clinical sequencing; not instruments alone, and not a combined LC/MS market. MGI 2024 annual report pp.41–42, citing CIC. [Primary disclosure](https://static.cninfo.com.cn/finalpage/2025-04-30/1223427376.PDF). |</a:t>
+            </a:r>
+          </a:p>
+          <a:p xmlns:a="http://schemas.openxmlformats.org/drawingml/2006/main">
+            <a:r>
+              <a:t>| Bioprocess chromatography resins | China / 2024 | US$578.2m* | Biological process resins; not all analytical columns, chemical adsorption resins or purification hardware. F&amp;S in Duoning 2026 filing, printed p.132. [Filing URL](https://www.hkexnews.hk/app/sehk/2026/108106/documents/sehk26011800033_c.pdf). |</a:t>
+            </a:r>
+          </a:p>
+          <a:p xmlns:a="http://schemas.openxmlformats.org/drawingml/2006/main">
+            <a:r>
+              <a:t/>
+            </a:r>
+          </a:p>
+          <a:p xmlns:a="http://schemas.openxmlformats.org/drawingml/2006/main">
+            <a:r>
+              <a:t>*The Duoning figures were checked against the publicly indexed official filing during the preceding research on 9–10 October 2026. Direct PDF access now returns 404. They carry lower source-access confidence than directly downloaded filings. The 2025 values in that filing remain forecasts and are deliberately not presented as 2025 actual results here.*</a:t>
+            </a:r>
+          </a:p>
+          <a:p xmlns:a="http://schemas.openxmlformats.org/drawingml/2006/main">
+            <a:r>
+              <a:t/>
+            </a:r>
+          </a:p>
+          <a:p xmlns:a="http://schemas.openxmlformats.org/drawingml/2006/main">
+            <a:r>
+              <a:t>These anchors cannot be added. Their geography, currency, year and boundary differ, and tools can be used across the six product families. Each headline sizes the stated subset, not the full box. In particular, the culture-media figure is a bioprocess anchor and cannot be generalized to all research media and cell models. Automation, mass spectrometry, flow cytometry, imaging and analytical columns are shown as tool families but are not assigned an unsupported combined TAM.</a:t>
+            </a:r>
+          </a:p>
+          <a:p xmlns:a="http://schemas.openxmlformats.org/drawingml/2006/main">
+            <a:r>
+              <a:t/>
+            </a:r>
+          </a:p>
+          <a:p xmlns:a="http://schemas.openxmlformats.org/drawingml/2006/main">
+            <a:r>
+              <a:t>## Supporting figure 02: consistent-scope LST comparison</a:t>
+            </a:r>
+          </a:p>
+          <a:p xmlns:a="http://schemas.openxmlformats.org/drawingml/2006/main">
+            <a:r>
+              <a:t/>
+            </a:r>
+          </a:p>
+          <a:p xmlns:a="http://schemas.openxmlformats.org/drawingml/2006/main">
+            <a:r>
+              <a:t>The ACROBiosystems HKEX filing of 30 Sep 2026 reports 2025 global LST US$41.5bn and China US$7.7bn under its F&amp;S scope, printed p.65 / PDF p.74. Research biological reagents are global US$26.4bn and China US$4.6bn, printed p.67 / PDF p.76. The residual other-tool values are derived: 41.5−26.4 =15.1 and 7.7−4.6 =3.1, in US$bn. China/global share is 7.7÷41.5 =18.6% rounded. This scope does not reconcile automatically to broader laboratory or manufacturing markets. [Primary filing](https://www1.hkexnews.hk/app/sehk/2026/108910/documents/sehk26093002651_c.pdf).</a:t>
+            </a:r>
+          </a:p>
+          <a:p xmlns:a="http://schemas.openxmlformats.org/drawingml/2006/main">
+            <a:r>
+              <a:t/>
+            </a:r>
+          </a:p>
+          <a:p xmlns:a="http://schemas.openxmlformats.org/drawingml/2006/main">
+            <a:r>
+              <a:t>## Illustrative and qualitative figures</a:t>
+            </a:r>
+          </a:p>
+          <a:p xmlns:a="http://schemas.openxmlformats.org/drawingml/2006/main">
+            <a:r>
+              <a:t/>
+            </a:r>
+          </a:p>
+          <a:p xmlns:a="http://schemas.openxmlformats.org/drawingml/2006/main">
+            <a:r>
+              <a:t>Figure 03 uses the supplied customer mixes: reagents 30/25/15/10/20%, consumables 20/20/15/30/15%, and instruments 25/20/10/15/30%, for academia, biotech/pharma R&amp;D, CRO/CDMO, pharma-owned production and IVD development. These are illustrative purchasing shares. Hospitals are not independently modeled, and distributors are not an end-customer category.</a:t>
+            </a:r>
+          </a:p>
+          <a:p xmlns:a="http://schemas.openxmlformats.org/drawingml/2006/main">
+            <a:r>
+              <a:t/>
+            </a:r>
+          </a:p>
+          <a:p xmlns:a="http://schemas.openxmlformats.org/drawingml/2006/main">
+            <a:r>
+              <a:t>Figure 06 compares 100,000 tests at 100µL in 96-well plates with 1,000,000 tests at 5µL in 1,536-well plates. Reagents fall from 10L to 5L; full-plate counts are ceiling(100,000/96)=1,042 and ceiling(1,000,000/1,536)=652. Tips per test are assumed to fall from 1 to 0.1, giving 100,000 tips in both cases. Volume index 1,000; reagent index 50; plate index 62.6; tip index 100, against a baseline of 100. Dead volume, controls, retests, ASP and service spending are excluded. The two panels use different y-axis scales.</a:t>
+            </a:r>
+          </a:p>
+          <a:p xmlns:a="http://schemas.openxmlformats.org/drawingml/2006/main">
+            <a:r>
+              <a:t/>
+            </a:r>
+          </a:p>
+          <a:p xmlns:a="http://schemas.openxmlformats.org/drawingml/2006/main">
+            <a:r>
+              <a:t>Figure 07 uses illustrative cumulative funding pools of US$50bn, US$100bn and US$200bn. No time horizon is specified. Allocations are 30% research equipment/automation, 25% research reagents, 20% research consumables, 15% manufacturing bioprocess tools and 10% services/other. Research-use and manufacturing-use allocations are mutually exclusive. These are not realized financing, annual TAM or a company revenue forecast.</a:t>
+            </a:r>
+          </a:p>
+          <a:p xmlns:a="http://schemas.openxmlformats.org/drawingml/2006/main">
+            <a:r>
+              <a:t/>
+            </a:r>
+          </a:p>
+          <a:p xmlns:a="http://schemas.openxmlformats.org/drawingml/2006/main">
+            <a:r>
+              <a:t>Figures 05, 08 and 09 use qualitative analyst positions. Bubble area in figure 05 is schematic relative opportunity, not measured TAM. Axis positions and the gold emphasis on ACROBiosystems and NanoMicro are not numerical scores, stock recommendations, market-share estimates or measured AI revenue. Supply barriers do not establish a current shortage.</a:t>
+            </a:r>
+          </a:p>
+          <a:p xmlns:a="http://schemas.openxmlformats.org/drawingml/2006/main">
+            <a:r>
+              <a:t/>
+            </a:r>
+          </a:p>
+          <a:p xmlns:a="http://schemas.openxmlformats.org/drawingml/2006/main">
+            <a:r>
+              <a:t>Figures 04 and 10 describe a conditional mechanism: funded projects → physical experimentation → net tool consumption and purchasing → company share → profit and cash flow. AI funding announcements alone do not establish LST orders. Miniaturization, faster candidate triage, resin reuse and pricing can offset higher experiment counts.</a:t>
+            </a:r>
+          </a:p>
+          <a:p xmlns:a="http://schemas.openxmlformats.org/drawingml/2006/main">
+            <a:r>
+              <a:t/>
+            </a:r>
+          </a:p>
+          <a:p xmlns:a="http://schemas.openxmlformats.org/drawingml/2006/main">
+            <a:r>
+              <a:t>## Representative-company product evidence</a:t>
+            </a:r>
+          </a:p>
+          <a:p xmlns:a="http://schemas.openxmlformats.org/drawingml/2006/main">
+            <a:r>
+              <a:t/>
+            </a:r>
+          </a:p>
+          <a:p xmlns:a="http://schemas.openxmlformats.org/drawingml/2006/main">
+            <a:r>
+              <a:t>- [ACROBiosystems HKEX application, 30 Sep 2026](https://www1.hkexnews.hk/app/sehk/2026/108910/documents/sehk26093002651_c.pdf): Printed pp. 65, 67 and 71 (PDF pp. 74, 76, 80); defined LST scope, research reagents and recombinant proteins.</a:t>
+            </a:r>
+          </a:p>
+          <a:p xmlns:a="http://schemas.openxmlformats.org/drawingml/2006/main">
+            <a:r>
+              <a:t>- [Vazyme 2024 annual report](https://static.cninfo.com.cn/finalpage/2025-04-10/1223046699.PDF): Product and business evidence; matrix positions are analyst assumptions.</a:t>
+            </a:r>
+          </a:p>
+          <a:p xmlns:a="http://schemas.openxmlformats.org/drawingml/2006/main">
+            <a:r>
+              <a:t>- [ACROBiosystems filing: recombinant protein competitive landscape](https://www1.hkexnews.hk/app/sehk/2026/108910/documents/sehk26093002651_c.pdf): Product and business evidence; matrix positions are analyst assumptions.</a:t>
+            </a:r>
+          </a:p>
+          <a:p xmlns:a="http://schemas.openxmlformats.org/drawingml/2006/main">
+            <a:r>
+              <a:t>- [Novoprotein official product catalog](https://www.novoprotein.com.cn/products): Product and business evidence; matrix positions are analyst assumptions.</a:t>
+            </a:r>
+          </a:p>
+          <a:p xmlns:a="http://schemas.openxmlformats.org/drawingml/2006/main">
+            <a:r>
+              <a:t>- [NanoMicro 2025 annual report](https://static.cninfo.com.cn/finalpage/2026-04-16/1225107014.PDF): Product and business evidence; matrix positions are analyst assumptions.</a:t>
+            </a:r>
+          </a:p>
+          <a:p xmlns:a="http://schemas.openxmlformats.org/drawingml/2006/main">
+            <a:r>
+              <a:t>- [Sepax IPO prospectus, Jan 2025](https://static.cninfo.com.cn/finalpage/2025-01-06/1222238930.PDF): Product and business evidence; matrix positions are analyst assumptions.</a:t>
+            </a:r>
+          </a:p>
+          <a:p xmlns:a="http://schemas.openxmlformats.org/drawingml/2006/main">
+            <a:r>
+              <a:t>- [JET Biofil 2025 interim report](https://stockmc.xueqiu.com/202508/688026_20250830_4FZX.pdf): Product and business evidence; matrix positions are analyst assumptions.</a:t>
+            </a:r>
+          </a:p>
+          <a:p xmlns:a="http://schemas.openxmlformats.org/drawingml/2006/main">
+            <a:r>
+              <a:t>- [Changhong official website](https://cn.sz-changhong.com/): Product and business evidence; matrix positions are analyst assumptions.</a:t>
+            </a:r>
+          </a:p>
+          <a:p xmlns:a="http://schemas.openxmlformats.org/drawingml/2006/main">
+            <a:r>
+              <a:t>- [Bide Pharmatech official catalog](https://www.bidepharm.com/): Product and business evidence; matrix positions are analyst assumptions.</a:t>
+            </a:r>
+          </a:p>
+          <a:p xmlns:a="http://schemas.openxmlformats.org/drawingml/2006/main">
+            <a:r>
+              <a:t>- [ChemExpress official website](https://www.chemexpress.com.cn/): Product and business evidence; matrix positions are analyst assumptions.</a:t>
+            </a:r>
+          </a:p>
+          <a:p xmlns:a="http://schemas.openxmlformats.org/drawingml/2006/main">
+            <a:r>
+              <a:t>- [MGI 2025 annual report](https://static.cninfo.com.cn/finalpage/2026-04-25/1225194780.PDF): Product and business evidence; matrix positions are analyst assumptions.</a:t>
+            </a:r>
+          </a:p>
+          <a:p xmlns:a="http://schemas.openxmlformats.org/drawingml/2006/main">
+            <a:r>
+              <a:t>- [OPM Biosciences 2025 annual report](https://pdf.dfcfw.com/pdf/H2_AN202604221821449851_1.pdf): Product and business evidence; matrix positions are analyst assumptions.</a:t>
+            </a:r>
+          </a:p>
+          <a:p xmlns:a="http://schemas.openxmlformats.org/drawingml/2006/main">
+            <a:r>
+              <a:t/>
+            </a:r>
+          </a:p>
+          <a:p xmlns:a="http://schemas.openxmlformats.org/drawingml/2006/main">
+            <a:r>
+              <a:t>The primary distinction in this research is product exposure: ACROBiosystems supplies recombinant proteins and assay tools used in expression and functional validation; NanoMicro supplies purification and chromatography products used in analytical/process development and manufacturing. A broad increase in virtual candidates does not establish either company's incremental orders. Manufacturing demand also depends on successful clinical translation and drug output.</a:t>
+            </a:r>
+          </a:p>
+          <a:p xmlns:a="http://schemas.openxmlformats.org/drawingml/2006/main">
+            <a:r>
+              <a:t/>
+            </a:r>
+          </a:p>
+          <a:p xmlns:a="http://schemas.openxmlformats.org/drawingml/2006/main">
+            <a:r>
+              <a:t>## Logo and icon assets</a:t>
+            </a:r>
+          </a:p>
+          <a:p xmlns:a="http://schemas.openxmlformats.org/drawingml/2006/main">
+            <a:r>
+              <a:t/>
+            </a:r>
+          </a:p>
+          <a:p xmlns:a="http://schemas.openxmlformats.org/drawingml/2006/main">
+            <a:r>
+              <a:t>Logo files identify representative suppliers. `assets/sources.json` gives source URLs and modifications. Where whitespace was trimmed, the brand artwork is unchanged. NanoMicro uses its circular emblem alongside a separate editable English company label, keeping all visible labels English. JET uses an English brand asset from a supplier listing. Company names remain editable even when a logo is embedded. Supplier lists are examples and are not rankings or endorsements.</a:t>
+            </a:r>
+          </a:p>
+          <a:p xmlns:a="http://schemas.openxmlformats.org/drawingml/2006/main">
+            <a:r>
+              <a:t/>
+            </a:r>
+          </a:p>
+          <a:p xmlns:a="http://schemas.openxmlformats.org/drawingml/2006/main">
+            <a:r>
+              <a:t>Lucide icons are sourced from the project's official GitHub repository, recolored teal for the graphic and provided under the ISC license. The full license is included in `assets/icons/LICENSE`.</a:t>
+            </a:r>
+          </a:p>
+          <a:p xmlns:a="http://schemas.openxmlformats.org/drawingml/2006/main">
+            <a:r>
+              <a:t/>
+            </a:r>
+          </a:p>
+          <a:p xmlns:a="http://schemas.openxmlformats.org/drawingml/2006/main">
+            <a:r>
+              <a:t/>
+            </a:r>
+          </a:p>
+          <a:p xmlns:a="http://schemas.openxmlformats.org/drawingml/2006/main">
+            <a:r>
+              <a:t># Supplier tickers and current BD exposure</a:t>
+            </a:r>
+          </a:p>
+          <a:p xmlns:a="http://schemas.openxmlformats.org/drawingml/2006/main">
+            <a:r>
+              <a:t/>
+            </a:r>
+          </a:p>
+          <a:p xmlns:a="http://schemas.openxmlformats.org/drawingml/2006/main">
+            <a:r>
+              <a:t>Updated 13 October 2026. Rows identify representative suppliers or their listed parents, not market shares or investment recommendations. China/HK and US groups refer to listing venues; they do not imply legal domicile, headquarters or pure-play exposure.</a:t>
+            </a:r>
+          </a:p>
+          <a:p xmlns:a="http://schemas.openxmlformats.org/drawingml/2006/main">
+            <a:r>
+              <a:t/>
+            </a:r>
+          </a:p>
+          <a:p xmlns:a="http://schemas.openxmlformats.org/drawingml/2006/main">
+            <a:r>
+              <a:t>BD (NYSE:BDX) remains relevant to specimen collection and preanalytical sample handling. Its former Biosciences and Diagnostic Solutions business, including flow cytometry, moved to Waters (NYSE:WAT) on 9 February 2026.</a:t>
+            </a:r>
+          </a:p>
+          <a:p xmlns:a="http://schemas.openxmlformats.org/drawingml/2006/main">
+            <a:r>
+              <a:t/>
+            </a:r>
+          </a:p>
+          <a:p xmlns:a="http://schemas.openxmlformats.org/drawingml/2006/main">
+            <a:r>
+              <a:t>- [BD completion release](https://investors.bd.com/news-events/press-releases/detail/937/bd-completes-combination-of-biosciences-diagnostic-solutions-business-with-waters-corporation)</a:t>
+            </a:r>
+          </a:p>
+          <a:p xmlns:a="http://schemas.openxmlformats.org/drawingml/2006/main">
+            <a:r>
+              <a:t>- [Waters current transaction disclosure](https://www.waters.com/nextgen/us/en/about-waters/corporate-governance/legal-and-privacy-notices/bdtransaction.html)</a:t>
+            </a:r>
+          </a:p>
+          <a:p xmlns:a="http://schemas.openxmlformats.org/drawingml/2006/main">
+            <a:r>
+              <a:t>- [Current BD Vacutainer portfolio](https://go.bd.com/vacutainer-product-updates-TY.html): specimen-collection / sample-management products.</a:t>
+            </a:r>
+          </a:p>
+          <a:p xmlns:a="http://schemas.openxmlformats.org/drawingml/2006/main">
+            <a:r>
+              <a:t/>
+            </a:r>
+          </a:p>
+          <a:p xmlns:a="http://schemas.openxmlformats.org/drawingml/2006/main">
+            <a:r>
+              <a:t>Gibco is shown with Thermo Fisher (TMO); Cytiva and HyClone with Danaher (DHR). The underlying business exposure is narrower than the parent company's total revenue. Tsingke's code 874813 is a NEEQ code, not an A-share exchange listing; its IPO application is a separate filing. Suzhou Sepax is 688758.SH; the graphic refers to the China-listed issuer's chromatography portfolio.</a:t>
+            </a:r>
+          </a:p>
+          <a:p xmlns:a="http://schemas.openxmlformats.org/drawingml/2006/main">
+            <a:r>
+              <a:t/>
+            </a:r>
+          </a:p>
+          <a:p xmlns:a="http://schemas.openxmlformats.org/drawingml/2006/main">
+            <a:r>
+              <a:t>| Supplier / parent | Exchange | Ticker | Product pathway | Primary listing / business source |</a:t>
+            </a:r>
+          </a:p>
+          <a:p xmlns:a="http://schemas.openxmlformats.org/drawingml/2006/main">
+            <a:r>
+              <a:t>|---|---|---|---|---|</a:t>
+            </a:r>
+          </a:p>
+          <a:p xmlns:a="http://schemas.openxmlformats.org/drawingml/2006/main">
+            <a:r>
+              <a:t>| GenScript | HKEX | 1548 | Molecular construction | [Source](https://www.genscript.com/genscript-biotech-demonstrates-profitable-scale-and-strategic-leadership-in-h1-2025.html) |</a:t>
+            </a:r>
+          </a:p>
+          <a:p xmlns:a="http://schemas.openxmlformats.org/drawingml/2006/main">
+            <a:r>
+              <a:t>| Vazyme | SSE | 688105 | Molecular construction | [Source](https://www.vazyme.us/AboutUs/OurStrories/) |</a:t>
+            </a:r>
+          </a:p>
+          <a:p xmlns:a="http://schemas.openxmlformats.org/drawingml/2006/main">
+            <a:r>
+              <a:t>| Tsingke | NEEQ | 874813 | DNA synthesis; NEEQ-listed, A-share IPO application is separate | [Source](https://static.sse.com.cn/stock/disclosure/announcement/c/202606/002233_20260630_Z9LA.pdf) |</a:t>
+            </a:r>
+          </a:p>
+          <a:p xmlns:a="http://schemas.openxmlformats.org/drawingml/2006/main">
+            <a:r>
+              <a:t>| ACROBiosystems | SZSE | 301080 | Proteins / functional cells | [Source](https://www1.hkexnews.hk/app/sehk/2026/108910/documents/sehk26093002651_c.pdf) |</a:t>
+            </a:r>
+          </a:p>
+          <a:p xmlns:a="http://schemas.openxmlformats.org/drawingml/2006/main">
+            <a:r>
+              <a:t>| Sino Biological | SZSE | 301047 | Research proteins / antibodies | [Source](https://disc.static.szse.cn/disc/disk03/finalpage/2026-08-26/cd4ea950-7931-4164-bcec-20c03b8236e1.PDF) |</a:t>
+            </a:r>
+          </a:p>
+          <a:p xmlns:a="http://schemas.openxmlformats.org/drawingml/2006/main">
+            <a:r>
+              <a:t>| OPM Biosciences | SSE | 688293 | Cell culture media | [Source](https://opmbiosciences.com/) |</a:t>
+            </a:r>
+          </a:p>
+          <a:p xmlns:a="http://schemas.openxmlformats.org/drawingml/2006/main">
+            <a:r>
+              <a:t>| JET Biofil | SSE | 688026 | Plastic laboratory consumables | [Source](https://static.cninfo.com.cn/finalpage/2026-04-30/1225255989.PDF) |</a:t>
+            </a:r>
+          </a:p>
+          <a:p xmlns:a="http://schemas.openxmlformats.org/drawingml/2006/main">
+            <a:r>
+              <a:t>| Changhong | SZSE | 300151 | Life science / medical plastic consumables | [Source](https://static.cninfo.com.cn/finalpage/2025-10-30/1224764410.PDF) |</a:t>
+            </a:r>
+          </a:p>
+          <a:p xmlns:a="http://schemas.openxmlformats.org/drawingml/2006/main">
+            <a:r>
+              <a:t>| MGI | SSE | 688114 | Sequencing instruments / consumables | [Source](https://static.cninfo.com.cn/finalpage/2025-04-30/1223427376.PDF) |</a:t>
+            </a:r>
+          </a:p>
+          <a:p xmlns:a="http://schemas.openxmlformats.org/drawingml/2006/main">
+            <a:r>
+              <a:t>| NanoMicro | SSE | 688690 | Chromatography materials and analytical separation / purification | [Source](https://static.cninfo.com.cn/finalpage/2026-09-22/1225575593.PDF) |</a:t>
+            </a:r>
+          </a:p>
+          <a:p xmlns:a="http://schemas.openxmlformats.org/drawingml/2006/main">
+            <a:r>
+              <a:t>| Suzhou Sepax | SSE | 688758 | Chromatography columns / process media | [Source](https://www.sepax-tech.com.cn/skin/default/investorpdf/%E8%8B%8F%E5%B7%9E%E8%B5%9B%E5%88%86%E7%A7%91%E6%8A%80%E8%82%A1%E4%BB%BD%E6%9C%89%E9%99%90%E5%85%AC%E5%8F%B82025%E5%B9%B4%E7%AC%AC%E4%B8%80%E6%AC%A1%E4%B8%B4%E6%97%B6%E8%82%A1%E4%B8%9C%E4%BC%9A%E4%BC%9A%E8%AE%AE%E8%B5%84%E6%96%99.pdf) |</a:t>
+            </a:r>
+          </a:p>
+          <a:p xmlns:a="http://schemas.openxmlformats.org/drawingml/2006/main">
+            <a:r>
+              <a:t>| Twist Bioscience | NASDAQ | TWST | DNA synthesis | [Source](https://investors.twistbioscience.com/static-files/8c1d5bed-df6f-48d5-832f-eb2f32717c27) |</a:t>
+            </a:r>
+          </a:p>
+          <a:p xmlns:a="http://schemas.openxmlformats.org/drawingml/2006/main">
+            <a:r>
+              <a:t>| Thermo Fisher / Gibco | NYSE | TMO | Molecular tools, proteins, media and instruments; parent ticker | [Source](https://ir.thermofisher.com/investors/news-events/news/news-details/2026/Thermo-Fisher-Scientific-Reports-Second-Quarter-2026-Results/) |</a:t>
+            </a:r>
+          </a:p>
+          <a:p xmlns:a="http://schemas.openxmlformats.org/drawingml/2006/main">
+            <a:r>
+              <a:t>| Bio-Techne | NASDAQ | TECH | Proteins / functional assay reagents | [Source](https://investors.bio-techne.com/stock-data) |</a:t>
+            </a:r>
+          </a:p>
+          <a:p xmlns:a="http://schemas.openxmlformats.org/drawingml/2006/main">
+            <a:r>
+              <a:t>| Danaher / Cytiva / HyClone | NYSE | DHR | Culture and purification; parent ticker | [Source](https://www.danaher.com/our-businesses/biotechnology) |</a:t>
+            </a:r>
+          </a:p>
+          <a:p xmlns:a="http://schemas.openxmlformats.org/drawingml/2006/main">
+            <a:r>
+              <a:t>| Corning | NYSE | GLW | Laboratory plastics / cell culture | [Source](https://www.corning.com/content/dam/corning/media/worldwide/global/documents/corning_10-k_2025.pdf) |</a:t>
+            </a:r>
+          </a:p>
+          <a:p xmlns:a="http://schemas.openxmlformats.org/drawingml/2006/main">
+            <a:r>
+              <a:t>| BD | NYSE | BDX | Current specimen collection / preanalytics; ex-BD flow is WAT | [Source](https://investors.bd.com/news-events/press-releases/detail/937/bd-completes-combination-of-biosciences-diagnostic-solutions-business-with-waters-corporation) |</a:t>
+            </a:r>
+          </a:p>
+          <a:p xmlns:a="http://schemas.openxmlformats.org/drawingml/2006/main">
+            <a:r>
+              <a:t>| Illumina | NASDAQ | ILMN | Sequencing instruments / consumables | [Source](https://investor.illumina.com/static-files/eb129ea4-1f1a-408f-b87a-44eaee93c63d) |</a:t>
+            </a:r>
+          </a:p>
+          <a:p xmlns:a="http://schemas.openxmlformats.org/drawingml/2006/main">
+            <a:r>
+              <a:t>| Agilent | NYSE | A | Chromatography / analytical instruments | [Source](https://www.investor.agilent.com/stock-info/stock-quote-and-chart/) |</a:t>
+            </a:r>
+          </a:p>
+          <a:p xmlns:a="http://schemas.openxmlformats.org/drawingml/2006/main">
+            <a:r>
+              <a:t>| Waters / former BD Biosciences | NYSE | WAT | LC-MS / chromatography and ex-BD flow cytometry | [Source](https://www.waters.com/nextgen/us/en/about-waters/corporate-governance/legal-and-privacy-notices/bdtransaction.html) |</a:t>
+            </a:r>
+          </a:p>
+          <a:p xmlns:a="http://schemas.openxmlformats.org/drawingml/2006/main">
+            <a:r>
+              <a:t>| Repligen | NASDAQ | RGEN | Bioprocess purification / filtration tools | [Source](https://investors.repligen.com/stock-info/default.aspx) |</a:t>
+            </a:r>
+          </a:p>
+          <a:p xmlns:a="http://schemas.openxmlformats.org/drawingml/2006/main">
+            <a:r>
+              <a:t>| Tecan | SIX | TECN | Laboratory automation; Swiss-listed | [Source](https://www.tecan.com/hubfs/HubDB/Te-PrArc/180323_Tecan_KeplerCheuvreux.pdf) |</a:t>
+            </a:r>
+          </a:p>
+          <a:p xmlns:a="http://schemas.openxmlformats.org/drawingml/2006/main">
+            <a:r>
+              <a:t/>
+            </a:r>
+          </a:p>
+          <a:p xmlns:a="http://schemas.openxmlformats.org/drawingml/2006/main">
+            <a:r>
+              <a:t>The market anchors retain their original scope and sources. Adding a supplier does not broaden or update the displayed TAM. The labware family includes a clinical/preanalytical adjacency for BD; the displayed anchor continues to be the selected China plastic laboratory-consumables estimate. The analytics anchor remains China sequencing instruments plus consumables; it does not size flow cytometry.</a:t>
+            </a:r>
+          </a:p>
+          <a:p xmlns:a="http://schemas.openxmlformats.org/drawingml/2006/main">
+            <a:r>
+              <a:t/>
+            </a:r>
+          </a:p>
+          <a:p xmlns:a="http://schemas.openxmlformats.org/drawingml/2006/main">
+            <a:r>
+              <a:t>Original BD logo: https://news.bd.com/images/header-bd-logo.svg. Original company marks retain their colors; chart/UI colors use the user-supplied palette. The second RGB value was explicitly confirmed by the user as 172:212:241.</a:t>
+            </a:r>
+          </a:p>
+          <a:p xmlns:a="http://schemas.openxmlformats.org/drawingml/2006/main">
+            <a:r>
+              <a:t/>
             </a:r>
           </a:p>
         </p:txBody>
@@ -489,7 +1389,7 @@
           <p:cNvPr id="3" name="Title">
             <a:extLst xmlns:a="http://schemas.openxmlformats.org/drawingml/2006/main">
               <a:ext uri="{FF2B5EF4-FFF2-40B4-BE49-F238E27FC236}">
-                <a16:creationId xmlns:a16="http://schemas.microsoft.com/office/drawing/2014/main" id="{A4AB42AD-DED0-49D1-9DDF-BAB2A212728B}"/>
+                <a16:creationId xmlns:a16="http://schemas.microsoft.com/office/drawing/2014/main" id="{4B2DFF4E-5666-4A51-8559-399F62BFE8F1}"/>
               </a:ext>
             </a:extLst>
           </p:cNvPr>
@@ -655,7 +1555,7 @@
           <p:cNvPr id="2" name="Subtitle">
             <a:extLst xmlns:a="http://schemas.openxmlformats.org/drawingml/2006/main">
               <a:ext uri="{FF2B5EF4-FFF2-40B4-BE49-F238E27FC236}">
-                <a16:creationId xmlns:a16="http://schemas.microsoft.com/office/drawing/2014/main" id="{6FC0D2CF-CCEB-4459-84A0-0E089CD71F16}"/>
+                <a16:creationId xmlns:a16="http://schemas.microsoft.com/office/drawing/2014/main" id="{7D3E1212-92C9-4275-BE68-176ED8703A9A}"/>
               </a:ext>
             </a:extLst>
           </p:cNvPr>
@@ -838,7 +1738,7 @@
           <p:cNvPr id="2" name="Section title">
             <a:extLst xmlns:a="http://schemas.openxmlformats.org/drawingml/2006/main">
               <a:ext uri="{FF2B5EF4-FFF2-40B4-BE49-F238E27FC236}">
-                <a16:creationId xmlns:a16="http://schemas.microsoft.com/office/drawing/2014/main" id="{AA33C56B-E2E9-40A1-82E4-211550905FA2}"/>
+                <a16:creationId xmlns:a16="http://schemas.microsoft.com/office/drawing/2014/main" id="{9EBC3C4C-1A76-4AE8-A424-FDBEDB53F824}"/>
               </a:ext>
             </a:extLst>
           </p:cNvPr>
@@ -1021,7 +1921,7 @@
           <p:cNvPr id="3" name="Title">
             <a:extLst xmlns:a="http://schemas.openxmlformats.org/drawingml/2006/main">
               <a:ext uri="{FF2B5EF4-FFF2-40B4-BE49-F238E27FC236}">
-                <a16:creationId xmlns:a16="http://schemas.microsoft.com/office/drawing/2014/main" id="{8EB52BA4-4E84-4DB8-A23A-BBB37DD36E3B}"/>
+                <a16:creationId xmlns:a16="http://schemas.microsoft.com/office/drawing/2014/main" id="{B03CDD4B-28B8-411D-8718-FA881AA58C58}"/>
               </a:ext>
             </a:extLst>
           </p:cNvPr>
@@ -1187,7 +2087,7 @@
           <p:cNvPr id="2" name="Body">
             <a:extLst xmlns:a="http://schemas.openxmlformats.org/drawingml/2006/main">
               <a:ext uri="{FF2B5EF4-FFF2-40B4-BE49-F238E27FC236}">
-                <a16:creationId xmlns:a16="http://schemas.microsoft.com/office/drawing/2014/main" id="{9F01BFC8-AF08-4C9A-92E1-908B99C77424}"/>
+                <a16:creationId xmlns:a16="http://schemas.microsoft.com/office/drawing/2014/main" id="{137D9293-61CD-44E7-BB79-B85E09377D5F}"/>
               </a:ext>
             </a:extLst>
           </p:cNvPr>
@@ -1370,7 +2270,7 @@
           <p:cNvPr id="4" name="Title">
             <a:extLst xmlns:a="http://schemas.openxmlformats.org/drawingml/2006/main">
               <a:ext uri="{FF2B5EF4-FFF2-40B4-BE49-F238E27FC236}">
-                <a16:creationId xmlns:a16="http://schemas.microsoft.com/office/drawing/2014/main" id="{325C02AE-D62F-4C51-BBD3-9D7E12E4A2C8}"/>
+                <a16:creationId xmlns:a16="http://schemas.microsoft.com/office/drawing/2014/main" id="{3604A93D-8D35-4579-8CBF-2DC46448E8F5}"/>
               </a:ext>
             </a:extLst>
           </p:cNvPr>
@@ -1536,7 +2436,7 @@
           <p:cNvPr id="2" name="Left column">
             <a:extLst xmlns:a="http://schemas.openxmlformats.org/drawingml/2006/main">
               <a:ext uri="{FF2B5EF4-FFF2-40B4-BE49-F238E27FC236}">
-                <a16:creationId xmlns:a16="http://schemas.microsoft.com/office/drawing/2014/main" id="{6FC3780E-978F-4013-BD48-649C6ADD02EB}"/>
+                <a16:creationId xmlns:a16="http://schemas.microsoft.com/office/drawing/2014/main" id="{BBDECC06-F707-4503-8843-902C2FF9E886}"/>
               </a:ext>
             </a:extLst>
           </p:cNvPr>
@@ -1702,7 +2602,7 @@
           <p:cNvPr id="3" name="Right column">
             <a:extLst xmlns:a="http://schemas.openxmlformats.org/drawingml/2006/main">
               <a:ext uri="{FF2B5EF4-FFF2-40B4-BE49-F238E27FC236}">
-                <a16:creationId xmlns:a16="http://schemas.microsoft.com/office/drawing/2014/main" id="{1722314F-E0AC-4295-9AC3-F1663D3987F8}"/>
+                <a16:creationId xmlns:a16="http://schemas.microsoft.com/office/drawing/2014/main" id="{4C3B21DC-F463-4C7B-BD8E-E12E56AD662D}"/>
               </a:ext>
             </a:extLst>
           </p:cNvPr>
@@ -1885,7 +2785,7 @@
           <p:cNvPr id="3" name="Title">
             <a:extLst xmlns:a="http://schemas.openxmlformats.org/drawingml/2006/main">
               <a:ext uri="{FF2B5EF4-FFF2-40B4-BE49-F238E27FC236}">
-                <a16:creationId xmlns:a16="http://schemas.microsoft.com/office/drawing/2014/main" id="{91F80378-D4C5-4DBD-9CAD-81C3AFCBC0CE}"/>
+                <a16:creationId xmlns:a16="http://schemas.microsoft.com/office/drawing/2014/main" id="{EFB509BF-44FE-4DB1-A187-32E640BD1763}"/>
               </a:ext>
             </a:extLst>
           </p:cNvPr>
@@ -2051,7 +2951,7 @@
           <p:cNvPr id="2" name="Left column">
             <a:extLst xmlns:a="http://schemas.openxmlformats.org/drawingml/2006/main">
               <a:ext uri="{FF2B5EF4-FFF2-40B4-BE49-F238E27FC236}">
-                <a16:creationId xmlns:a16="http://schemas.microsoft.com/office/drawing/2014/main" id="{D054C07A-684A-475F-B210-E0E895686749}"/>
+                <a16:creationId xmlns:a16="http://schemas.microsoft.com/office/drawing/2014/main" id="{37B0E5B8-3A9C-495B-A418-094A904B4A9C}"/>
               </a:ext>
             </a:extLst>
           </p:cNvPr>
@@ -2255,12 +3155,12 @@
   </p:cSld>
   <p:clrMap bg1="lt1" tx1="dk1" bg2="lt2" tx2="dk2" accent1="accent1" accent2="accent2" accent3="accent3" accent4="accent4" accent5="accent5" accent6="accent6" hlink="hlink" folHlink="folHlink"/>
   <p:sldLayoutIdLst>
-    <p:sldLayoutId xmlns:r="http://schemas.openxmlformats.org/officeDocument/2006/relationships" id="2147483649" r:id="R1b8501b3e11347ed"/>
-    <p:sldLayoutId xmlns:r="http://schemas.openxmlformats.org/officeDocument/2006/relationships" id="2147483650" r:id="Re806e90675d3436f"/>
-    <p:sldLayoutId xmlns:r="http://schemas.openxmlformats.org/officeDocument/2006/relationships" id="2147483651" r:id="R986cc02d5e3a4d81"/>
-    <p:sldLayoutId xmlns:r="http://schemas.openxmlformats.org/officeDocument/2006/relationships" id="2147483652" r:id="R050c1ee797b445d3"/>
-    <p:sldLayoutId xmlns:r="http://schemas.openxmlformats.org/officeDocument/2006/relationships" id="2147483653" r:id="R696687383f304a47"/>
-    <p:sldLayoutId xmlns:r="http://schemas.openxmlformats.org/officeDocument/2006/relationships" id="2147483654" r:id="R53d7da333b76446e"/>
+    <p:sldLayoutId xmlns:r="http://schemas.openxmlformats.org/officeDocument/2006/relationships" id="2147483649" r:id="Ra5b4b4502c574020"/>
+    <p:sldLayoutId xmlns:r="http://schemas.openxmlformats.org/officeDocument/2006/relationships" id="2147483650" r:id="Raf5bbea30b4d4041"/>
+    <p:sldLayoutId xmlns:r="http://schemas.openxmlformats.org/officeDocument/2006/relationships" id="2147483651" r:id="Rb14bb46a53f64bd9"/>
+    <p:sldLayoutId xmlns:r="http://schemas.openxmlformats.org/officeDocument/2006/relationships" id="2147483652" r:id="Re72e03ee526d44b6"/>
+    <p:sldLayoutId xmlns:r="http://schemas.openxmlformats.org/officeDocument/2006/relationships" id="2147483653" r:id="Rfff9a34956ad4b52"/>
+    <p:sldLayoutId xmlns:r="http://schemas.openxmlformats.org/officeDocument/2006/relationships" id="2147483654" r:id="R1f2625863f924c5b"/>
   </p:sldLayoutIdLst>
   <p:txStyles>
     <p:titleStyle>
@@ -2811,7 +3711,7 @@
           <p:cNvPr id="10" name="">
             <a:extLst xmlns:a="http://schemas.openxmlformats.org/drawingml/2006/main">
               <a:ext uri="{FF2B5EF4-FFF2-40B4-BE49-F238E27FC236}">
-                <a16:creationId xmlns:a16="http://schemas.microsoft.com/office/drawing/2014/main" id="{AC4A1547-DCD2-4E68-9B87-B07FDCF10B59}"/>
+                <a16:creationId xmlns:a16="http://schemas.microsoft.com/office/drawing/2014/main" id="{76BE3752-609F-4AFF-8383-46E35B09BDDA}"/>
               </a:ext>
             </a:extLst>
           </p:cNvPr>
@@ -2838,10 +3738,10 @@
       </p:sp>
       <p:sp>
         <p:nvSpPr>
-          <p:cNvPr id="2" name="Design capacity expands. Validation must keep up.">
+          <p:cNvPr id="2" name="AI discovery: workflows, evidence and sensitivities">
             <a:extLst xmlns:a="http://schemas.openxmlformats.org/drawingml/2006/main">
               <a:ext uri="{FF2B5EF4-FFF2-40B4-BE49-F238E27FC236}">
-                <a16:creationId xmlns:a16="http://schemas.microsoft.com/office/drawing/2014/main" id="{E0042B28-B1FD-43BD-B590-23F8FD297B10}"/>
+                <a16:creationId xmlns:a16="http://schemas.microsoft.com/office/drawing/2014/main" id="{CDBADD76-7E0D-4858-B70A-4F8975561292}"/>
               </a:ext>
             </a:extLst>
           </p:cNvPr>
@@ -2898,17 +3798,17 @@
                 <a:ea typeface="Arial"/>
                 <a:cs typeface="Arial"/>
               </a:rPr>
-              <a:t>Design capacity expands. Validation must keep up.</a:t>
+              <a:t>AI discovery: workflows, evidence and sensitivities</a:t>
             </a:r>
           </a:p>
         </p:txBody>
       </p:sp>
       <p:sp>
         <p:nvSpPr>
-          <p:cNvPr id="3" name="Illustrative stage comparison, normalized per one clinical entrant. Supplied assumptions, not cohort statistics.">
+          <p:cNvPr id="3" name="Modalities use different units. Workload sensitivities and historical clinical benchmarks are shown separately.">
             <a:extLst xmlns:a="http://schemas.openxmlformats.org/drawingml/2006/main">
               <a:ext uri="{FF2B5EF4-FFF2-40B4-BE49-F238E27FC236}">
-                <a16:creationId xmlns:a16="http://schemas.microsoft.com/office/drawing/2014/main" id="{B55E4D7B-97BA-4B86-8337-5EF3AD4E8D53}"/>
+                <a16:creationId xmlns:a16="http://schemas.microsoft.com/office/drawing/2014/main" id="{493B987F-B96B-4C57-A49E-666B31422D89}"/>
               </a:ext>
             </a:extLst>
           </p:cNvPr>
@@ -2965,7 +3865,7 @@
                 <a:ea typeface="Arial"/>
                 <a:cs typeface="Arial"/>
               </a:rPr>
-              <a:t>Illustrative stage comparison, normalized per one clinical entrant. Supplied assumptions, not cohort statistics.</a:t>
+              <a:t>Modalities use different units. Workload sensitivities and historical clinical benchmarks are shown separately.</a:t>
             </a:r>
           </a:p>
         </p:txBody>
@@ -2975,7 +3875,7 @@
           <p:cNvPr id="4" name="">
             <a:extLst xmlns:a="http://schemas.openxmlformats.org/drawingml/2006/main">
               <a:ext uri="{FF2B5EF4-FFF2-40B4-BE49-F238E27FC236}">
-                <a16:creationId xmlns:a16="http://schemas.microsoft.com/office/drawing/2014/main" id="{83F494FC-03B2-4605-900B-C7ACEA30C6F1}"/>
+                <a16:creationId xmlns:a16="http://schemas.microsoft.com/office/drawing/2014/main" id="{5E91B5EC-9D67-4209-8F8A-C91883007D58}"/>
               </a:ext>
             </a:extLst>
           </p:cNvPr>
@@ -3015,7 +3915,7 @@
           <p:cNvPr id="5" name="">
             <a:extLst xmlns:a="http://schemas.openxmlformats.org/drawingml/2006/main">
               <a:ext uri="{FF2B5EF4-FFF2-40B4-BE49-F238E27FC236}">
-                <a16:creationId xmlns:a16="http://schemas.microsoft.com/office/drawing/2014/main" id="{F7CC2BD3-CECC-405F-A638-D7B0615039A2}"/>
+                <a16:creationId xmlns:a16="http://schemas.microsoft.com/office/drawing/2014/main" id="{DDE53FCF-A6E5-4C3B-B0EC-C5D401DEC6E8}"/>
               </a:ext>
             </a:extLst>
           </p:cNvPr>
@@ -3031,10 +3931,10 @@
             <a:tbl>
               <a:tblPr firstRow="1" bandRow="0"/>
               <a:tblGrid>
-                <a:gridCol w="4905375"/>
-                <a:gridCol w="1809750"/>
-                <a:gridCol w="2428875"/>
-                <a:gridCol w="7772400"/>
+                <a:gridCol w="4143375"/>
+                <a:gridCol w="2952750"/>
+                <a:gridCol w="3143250"/>
+                <a:gridCol w="6677025"/>
               </a:tblGrid>
               <a:tr h="666750">
                 <a:tc>
@@ -3046,7 +3946,7 @@
                         <a:buNone/>
                       </a:pPr>
                       <a:r>
-                        <a:rPr sz="1500" b="1">
+                        <a:rPr sz="1350" b="1">
                           <a:solidFill>
                             <a:srgbClr val="FFFFFF"/>
                           </a:solidFill>
@@ -3058,7 +3958,7 @@
                       </a:r>
                     </a:p>
                   </a:txBody>
-                  <a:tcPr marL="209550" marR="171450" marT="152400" marB="133350" anchor="ctr">
+                  <a:tcPr marL="209550" marR="171450" marT="114300" marB="95250" anchor="ctr">
                     <a:lnL w="0">
                       <a:solidFill>
                         <a:srgbClr val="FFFFFF"/>
@@ -3093,7 +3993,7 @@
                         <a:buNone/>
                       </a:pPr>
                       <a:r>
-                        <a:rPr sz="1500" b="1">
+                        <a:rPr sz="1350" b="1">
                           <a:solidFill>
                             <a:srgbClr val="FFFFFF"/>
                           </a:solidFill>
@@ -3101,11 +4001,11 @@
                           <a:ea typeface="Arial"/>
                           <a:cs typeface="Arial"/>
                         </a:rPr>
-                        <a:t>PRE-AI</a:t>
+                        <a:t>BEFORE GEN-AI</a:t>
                       </a:r>
                     </a:p>
                   </a:txBody>
-                  <a:tcPr marL="209550" marR="171450" marT="152400" marB="133350" anchor="ctr">
+                  <a:tcPr marL="209550" marR="171450" marT="114300" marB="95250" anchor="ctr">
                     <a:lnR w="0">
                       <a:solidFill>
                         <a:srgbClr val="FFFFFF"/>
@@ -3135,7 +4035,7 @@
                         <a:buNone/>
                       </a:pPr>
                       <a:r>
-                        <a:rPr sz="1500" b="1">
+                        <a:rPr sz="1350" b="1">
                           <a:solidFill>
                             <a:srgbClr val="FFFFFF"/>
                           </a:solidFill>
@@ -3143,11 +4043,11 @@
                           <a:ea typeface="Arial"/>
                           <a:cs typeface="Arial"/>
                         </a:rPr>
-                        <a:t>AI ERA</a:t>
+                        <a:t>AI MECHANISMS</a:t>
                       </a:r>
                     </a:p>
                   </a:txBody>
-                  <a:tcPr marL="209550" marR="171450" marT="152400" marB="133350" anchor="ctr">
+                  <a:tcPr marL="209550" marR="171450" marT="114300" marB="95250" anchor="ctr">
                     <a:lnR w="0">
                       <a:solidFill>
                         <a:srgbClr val="FFFFFF"/>
@@ -3177,7 +4077,7 @@
                         <a:buNone/>
                       </a:pPr>
                       <a:r>
-                        <a:rPr sz="1500" b="1">
+                        <a:rPr sz="1350" b="1">
                           <a:solidFill>
                             <a:srgbClr val="FFFFFF"/>
                           </a:solidFill>
@@ -3189,7 +4089,7 @@
                       </a:r>
                     </a:p>
                   </a:txBody>
-                  <a:tcPr marL="209550" marR="171450" marT="152400" marB="133350" anchor="ctr">
+                  <a:tcPr marL="209550" marR="171450" marT="114300" marB="95250" anchor="ctr">
                     <a:lnR w="0">
                       <a:solidFill>
                         <a:srgbClr val="FFFFFF"/>
@@ -3221,7 +4121,7 @@
                         <a:buNone/>
                       </a:pPr>
                       <a:r>
-                        <a:rPr sz="1875" b="0">
+                        <a:rPr sz="1650" b="0">
                           <a:solidFill>
                             <a:srgbClr val="00355F"/>
                           </a:solidFill>
@@ -3229,27 +4129,11 @@
                           <a:ea typeface="Arial"/>
                           <a:cs typeface="Arial"/>
                         </a:rPr>
-                        <a:t>Molecules designed</a:t>
-                      </a:r>
-                    </a:p>
-                    <a:p>
-                      <a:pPr algn="l">
-                        <a:buNone/>
-                      </a:pPr>
-                      <a:r>
-                        <a:rPr sz="1875" b="0">
-                          <a:solidFill>
-                            <a:srgbClr val="00355F"/>
-                          </a:solidFill>
-                          <a:latin typeface="Arial"/>
-                          <a:ea typeface="Arial"/>
-                          <a:cs typeface="Arial"/>
-                        </a:rPr>
-                        <a:t>(virtual)</a:t>
+                        <a:t>Virtual search / design</a:t>
                       </a:r>
                     </a:p>
                   </a:txBody>
-                  <a:tcPr marL="209550" marR="171450" marT="152400" marB="133350" anchor="ctr">
+                  <a:tcPr marL="209550" marR="171450" marT="114300" marB="95250" anchor="ctr">
                     <a:lnL w="0">
                       <a:solidFill>
                         <a:srgbClr val="FFFFFF"/>
@@ -3279,7 +4163,7 @@
                         <a:buNone/>
                       </a:pPr>
                       <a:r>
-                        <a:rPr sz="2400" b="0">
+                        <a:rPr sz="1800" b="0">
                           <a:solidFill>
                             <a:srgbClr val="00355F"/>
                           </a:solidFill>
@@ -3287,11 +4171,27 @@
                           <a:ea typeface="Arial"/>
                           <a:cs typeface="Arial"/>
                         </a:rPr>
-                        <a:t>~10³</a:t>
+                        <a:t>Large virtual</a:t>
+                      </a:r>
+                    </a:p>
+                    <a:p>
+                      <a:pPr algn="ctr">
+                        <a:buNone/>
+                      </a:pPr>
+                      <a:r>
+                        <a:rPr sz="1800" b="0">
+                          <a:solidFill>
+                            <a:srgbClr val="00355F"/>
+                          </a:solidFill>
+                          <a:latin typeface="Arial"/>
+                          <a:ea typeface="Arial"/>
+                          <a:cs typeface="Arial"/>
+                        </a:rPr>
+                        <a:t>libraries</a:t>
                       </a:r>
                     </a:p>
                   </a:txBody>
-                  <a:tcPr marL="209550" marR="171450" marT="152400" marB="133350" anchor="ctr">
+                  <a:tcPr marL="209550" marR="171450" marT="114300" marB="95250" anchor="ctr">
                     <a:lnR w="0">
                       <a:solidFill>
                         <a:srgbClr val="FFFFFF"/>
@@ -3316,7 +4216,7 @@
                         <a:buNone/>
                       </a:pPr>
                       <a:r>
-                        <a:rPr sz="2400" b="0">
+                        <a:rPr sz="1800" b="0">
                           <a:solidFill>
                             <a:srgbClr val="00355F"/>
                           </a:solidFill>
@@ -3324,11 +4224,27 @@
                           <a:ea typeface="Arial"/>
                           <a:cs typeface="Arial"/>
                         </a:rPr>
-                        <a:t>10⁵–10⁹</a:t>
+                        <a:t>Quality +</a:t>
+                      </a:r>
+                    </a:p>
+                    <a:p>
+                      <a:pPr algn="ctr">
+                        <a:buNone/>
+                      </a:pPr>
+                      <a:r>
+                        <a:rPr sz="1800" b="0">
+                          <a:solidFill>
+                            <a:srgbClr val="00355F"/>
+                          </a:solidFill>
+                          <a:latin typeface="Arial"/>
+                          <a:ea typeface="Arial"/>
+                          <a:cs typeface="Arial"/>
+                        </a:rPr>
+                        <a:t>selection</a:t>
                       </a:r>
                     </a:p>
                   </a:txBody>
-                  <a:tcPr marL="209550" marR="171450" marT="152400" marB="133350" anchor="ctr">
+                  <a:tcPr marL="209550" marR="171450" marT="114300" marB="95250" anchor="ctr">
                     <a:lnR w="0">
                       <a:solidFill>
                         <a:srgbClr val="FFFFFF"/>
@@ -3353,7 +4269,7 @@
                         <a:buNone/>
                       </a:pPr>
                       <a:r>
-                        <a:rPr sz="1875" b="0">
+                        <a:rPr sz="1650" b="0">
                           <a:solidFill>
                             <a:srgbClr val="00355F"/>
                           </a:solidFill>
@@ -3361,7 +4277,7 @@
                           <a:ea typeface="Arial"/>
                           <a:cs typeface="Arial"/>
                         </a:rPr>
-                        <a:t>Generative models can expand</a:t>
+                        <a:t>Large libraries predate generative AI.</a:t>
                       </a:r>
                     </a:p>
                     <a:p>
@@ -3369,7 +4285,7 @@
                         <a:buNone/>
                       </a:pPr>
                       <a:r>
-                        <a:rPr sz="1875" b="0">
+                        <a:rPr sz="1650" b="0">
                           <a:solidFill>
                             <a:srgbClr val="00355F"/>
                           </a:solidFill>
@@ -3377,11 +4293,11 @@
                           <a:ea typeface="Arial"/>
                           <a:cs typeface="Arial"/>
                         </a:rPr>
-                        <a:t>candidate enumeration at low marginal cost.</a:t>
+                        <a:t>The investment mechanism is better selection and learning.</a:t>
                       </a:r>
                     </a:p>
                   </a:txBody>
-                  <a:tcPr marL="209550" marR="171450" marT="152400" marB="133350" anchor="ctr">
+                  <a:tcPr marL="209550" marR="171450" marT="114300" marB="95250" anchor="ctr">
                     <a:lnR w="0">
                       <a:solidFill>
                         <a:srgbClr val="FFFFFF"/>
@@ -3408,7 +4324,7 @@
                         <a:buNone/>
                       </a:pPr>
                       <a:r>
-                        <a:rPr sz="1875" b="0">
+                        <a:rPr sz="1650" b="0">
                           <a:solidFill>
                             <a:srgbClr val="00355F"/>
                           </a:solidFill>
@@ -3416,11 +4332,11 @@
                           <a:ea typeface="Arial"/>
                           <a:cs typeface="Arial"/>
                         </a:rPr>
-                        <a:t>Molecules physically made</a:t>
+                        <a:t>Physical samples</a:t>
                       </a:r>
                     </a:p>
                   </a:txBody>
-                  <a:tcPr marL="209550" marR="171450" marT="152400" marB="133350" anchor="ctr">
+                  <a:tcPr marL="209550" marR="171450" marT="114300" marB="95250" anchor="ctr">
                     <a:lnL w="0">
                       <a:solidFill>
                         <a:srgbClr val="FFFFFF"/>
@@ -3450,7 +4366,7 @@
                         <a:buNone/>
                       </a:pPr>
                       <a:r>
-                        <a:rPr sz="2400" b="0">
+                        <a:rPr sz="1800" b="0">
                           <a:solidFill>
                             <a:srgbClr val="00355F"/>
                           </a:solidFill>
@@ -3458,11 +4374,27 @@
                           <a:ea typeface="Arial"/>
                           <a:cs typeface="Arial"/>
                         </a:rPr>
-                        <a:t>~10³</a:t>
+                        <a:t>Program-</a:t>
+                      </a:r>
+                    </a:p>
+                    <a:p>
+                      <a:pPr algn="ctr">
+                        <a:buNone/>
+                      </a:pPr>
+                      <a:r>
+                        <a:rPr sz="1800" b="0">
+                          <a:solidFill>
+                            <a:srgbClr val="00355F"/>
+                          </a:solidFill>
+                          <a:latin typeface="Arial"/>
+                          <a:ea typeface="Arial"/>
+                          <a:cs typeface="Arial"/>
+                        </a:rPr>
+                        <a:t>specific</a:t>
                       </a:r>
                     </a:p>
                   </a:txBody>
-                  <a:tcPr marL="209550" marR="171450" marT="152400" marB="133350" anchor="ctr">
+                  <a:tcPr marL="209550" marR="171450" marT="114300" marB="95250" anchor="ctr">
                     <a:lnR w="0">
                       <a:solidFill>
                         <a:srgbClr val="FFFFFF"/>
@@ -3487,7 +4419,7 @@
                         <a:buNone/>
                       </a:pPr>
                       <a:r>
-                        <a:rPr sz="2400" b="0">
+                        <a:rPr sz="1800" b="0">
                           <a:solidFill>
                             <a:srgbClr val="00355F"/>
                           </a:solidFill>
@@ -3495,11 +4427,27 @@
                           <a:ea typeface="Arial"/>
                           <a:cs typeface="Arial"/>
                         </a:rPr>
-                        <a:t>10³–10⁴</a:t>
+                        <a:t>Modality-</a:t>
+                      </a:r>
+                    </a:p>
+                    <a:p>
+                      <a:pPr algn="ctr">
+                        <a:buNone/>
+                      </a:pPr>
+                      <a:r>
+                        <a:rPr sz="1800" b="0">
+                          <a:solidFill>
+                            <a:srgbClr val="00355F"/>
+                          </a:solidFill>
+                          <a:latin typeface="Arial"/>
+                          <a:ea typeface="Arial"/>
+                          <a:cs typeface="Arial"/>
+                        </a:rPr>
+                        <a:t>dependent</a:t>
                       </a:r>
                     </a:p>
                   </a:txBody>
-                  <a:tcPr marL="209550" marR="171450" marT="152400" marB="133350" anchor="ctr">
+                  <a:tcPr marL="209550" marR="171450" marT="114300" marB="95250" anchor="ctr">
                     <a:lnR w="0">
                       <a:solidFill>
                         <a:srgbClr val="FFFFFF"/>
@@ -3524,7 +4472,7 @@
                         <a:buNone/>
                       </a:pPr>
                       <a:r>
-                        <a:rPr sz="1875" b="0">
+                        <a:rPr sz="1650" b="0">
                           <a:solidFill>
                             <a:srgbClr val="00355F"/>
                           </a:solidFill>
@@ -3532,7 +4480,7 @@
                           <a:ea typeface="Arial"/>
                           <a:cs typeface="Arial"/>
                         </a:rPr>
-                        <a:t>Automated synthesis and DNA libraries</a:t>
+                        <a:t>Small molecules can need fewer syntheses per program.</a:t>
                       </a:r>
                     </a:p>
                     <a:p>
@@ -3540,7 +4488,7 @@
                         <a:buNone/>
                       </a:pPr>
                       <a:r>
-                        <a:rPr sz="1875" b="0">
+                        <a:rPr sz="1650" b="0">
                           <a:solidFill>
                             <a:srgbClr val="00355F"/>
                           </a:solidFill>
@@ -3548,11 +4496,11 @@
                           <a:ea typeface="Arial"/>
                           <a:cs typeface="Arial"/>
                         </a:rPr>
-                        <a:t>can expand construction capacity.</a:t>
+                        <a:t>Protein libraries and individual profiling are different units.</a:t>
                       </a:r>
                     </a:p>
                   </a:txBody>
-                  <a:tcPr marL="209550" marR="171450" marT="152400" marB="133350" anchor="ctr">
+                  <a:tcPr marL="209550" marR="171450" marT="114300" marB="95250" anchor="ctr">
                     <a:lnR w="0">
                       <a:solidFill>
                         <a:srgbClr val="FFFFFF"/>
@@ -3579,7 +4527,7 @@
                         <a:buNone/>
                       </a:pPr>
                       <a:r>
-                        <a:rPr sz="1875" b="1">
+                        <a:rPr sz="1650" b="1">
                           <a:solidFill>
                             <a:srgbClr val="00355F"/>
                           </a:solidFill>
@@ -3587,11 +4535,11 @@
                           <a:ea typeface="Arial"/>
                           <a:cs typeface="Arial"/>
                         </a:rPr>
-                        <a:t>Fully profiled in wet lab</a:t>
+                        <a:t>Assay workload</a:t>
                       </a:r>
                     </a:p>
                   </a:txBody>
-                  <a:tcPr marL="209550" marR="171450" marT="152400" marB="133350" anchor="ctr">
+                  <a:tcPr marL="209550" marR="171450" marT="114300" marB="95250" anchor="ctr">
                     <a:lnL w="0">
                       <a:solidFill>
                         <a:srgbClr val="FFFFFF"/>
@@ -3621,7 +4569,7 @@
                         <a:buNone/>
                       </a:pPr>
                       <a:r>
-                        <a:rPr sz="2400" b="1">
+                        <a:rPr sz="1800" b="1">
                           <a:solidFill>
                             <a:srgbClr val="00355F"/>
                           </a:solidFill>
@@ -3629,11 +4577,11 @@
                           <a:ea typeface="Arial"/>
                           <a:cs typeface="Arial"/>
                         </a:rPr>
-                        <a:t>~50</a:t>
+                        <a:t>1× baseline</a:t>
                       </a:r>
                     </a:p>
                   </a:txBody>
-                  <a:tcPr marL="209550" marR="171450" marT="152400" marB="133350" anchor="ctr">
+                  <a:tcPr marL="209550" marR="171450" marT="114300" marB="95250" anchor="ctr">
                     <a:lnR w="0">
                       <a:solidFill>
                         <a:srgbClr val="FFFFFF"/>
@@ -3658,7 +4606,7 @@
                         <a:buNone/>
                       </a:pPr>
                       <a:r>
-                        <a:rPr sz="2400" b="1">
+                        <a:rPr sz="1800" b="1">
                           <a:solidFill>
                             <a:srgbClr val="00355F"/>
                           </a:solidFill>
@@ -3666,11 +4614,27 @@
                           <a:ea typeface="Arial"/>
                           <a:cs typeface="Arial"/>
                         </a:rPr>
-                        <a:t>50 → 500</a:t>
+                        <a:t>1× / 2× /</a:t>
+                      </a:r>
+                    </a:p>
+                    <a:p>
+                      <a:pPr algn="ctr">
+                        <a:buNone/>
+                      </a:pPr>
+                      <a:r>
+                        <a:rPr sz="1800" b="1">
+                          <a:solidFill>
+                            <a:srgbClr val="00355F"/>
+                          </a:solidFill>
+                          <a:latin typeface="Arial"/>
+                          <a:ea typeface="Arial"/>
+                          <a:cs typeface="Arial"/>
+                        </a:rPr>
+                        <a:t>5× / 10×</a:t>
                       </a:r>
                     </a:p>
                   </a:txBody>
-                  <a:tcPr marL="209550" marR="171450" marT="152400" marB="133350" anchor="ctr">
+                  <a:tcPr marL="209550" marR="171450" marT="114300" marB="95250" anchor="ctr">
                     <a:lnR w="0">
                       <a:solidFill>
                         <a:srgbClr val="FFFFFF"/>
@@ -3695,7 +4659,7 @@
                         <a:buNone/>
                       </a:pPr>
                       <a:r>
-                        <a:rPr sz="1875" b="1">
+                        <a:rPr sz="1650" b="1">
                           <a:solidFill>
                             <a:srgbClr val="00355F"/>
                           </a:solidFill>
@@ -3703,7 +4667,7 @@
                           <a:ea typeface="Arial"/>
                           <a:cs typeface="Arial"/>
                         </a:rPr>
-                        <a:t>Illustrative capacity expansion</a:t>
+                        <a:t>Analyst workload sensitivities, not predicted fully profiled</a:t>
                       </a:r>
                     </a:p>
                     <a:p>
@@ -3711,7 +4675,7 @@
                         <a:buNone/>
                       </a:pPr>
                       <a:r>
-                        <a:rPr sz="1875" b="1">
+                        <a:rPr sz="1650" b="1">
                           <a:solidFill>
                             <a:srgbClr val="00355F"/>
                           </a:solidFill>
@@ -3719,11 +4683,11 @@
                           <a:ea typeface="Arial"/>
                           <a:cs typeface="Arial"/>
                         </a:rPr>
-                        <a:t>that investors would need to fund.</a:t>
+                        <a:t>candidate counts. Include an efficiency/no-growth case.</a:t>
                       </a:r>
                     </a:p>
                   </a:txBody>
-                  <a:tcPr marL="209550" marR="171450" marT="152400" marB="133350" anchor="ctr">
+                  <a:tcPr marL="209550" marR="171450" marT="114300" marB="95250" anchor="ctr">
                     <a:lnR w="0">
                       <a:solidFill>
                         <a:srgbClr val="FFFFFF"/>
@@ -3750,7 +4714,7 @@
                         <a:buNone/>
                       </a:pPr>
                       <a:r>
-                        <a:rPr sz="1875" b="0">
+                        <a:rPr sz="1650" b="0">
                           <a:solidFill>
                             <a:srgbClr val="00355F"/>
                           </a:solidFill>
@@ -3758,11 +4722,11 @@
                           <a:ea typeface="Arial"/>
                           <a:cs typeface="Arial"/>
                         </a:rPr>
-                        <a:t>Clinical entry</a:t>
+                        <a:t>Clinical development</a:t>
                       </a:r>
                     </a:p>
                   </a:txBody>
-                  <a:tcPr marL="209550" marR="171450" marT="152400" marB="133350" anchor="ctr">
+                  <a:tcPr marL="209550" marR="171450" marT="114300" marB="95250" anchor="ctr">
                     <a:lnL w="0">
                       <a:solidFill>
                         <a:srgbClr val="FFFFFF"/>
@@ -3792,7 +4756,7 @@
                         <a:buNone/>
                       </a:pPr>
                       <a:r>
-                        <a:rPr sz="2400" b="0">
+                        <a:rPr sz="1800" b="0">
                           <a:solidFill>
                             <a:srgbClr val="00355F"/>
                           </a:solidFill>
@@ -3800,11 +4764,27 @@
                           <a:ea typeface="Arial"/>
                           <a:cs typeface="Arial"/>
                         </a:rPr>
-                        <a:t>1</a:t>
+                        <a:t>Phase I</a:t>
+                      </a:r>
+                    </a:p>
+                    <a:p>
+                      <a:pPr algn="ctr">
+                        <a:buNone/>
+                      </a:pPr>
+                      <a:r>
+                        <a:rPr sz="1800" b="0">
+                          <a:solidFill>
+                            <a:srgbClr val="00355F"/>
+                          </a:solidFill>
+                          <a:latin typeface="Arial"/>
+                          <a:ea typeface="Arial"/>
+                          <a:cs typeface="Arial"/>
+                        </a:rPr>
+                        <a:t>programs</a:t>
                       </a:r>
                     </a:p>
                   </a:txBody>
-                  <a:tcPr marL="209550" marR="171450" marT="152400" marB="133350" anchor="ctr">
+                  <a:tcPr marL="209550" marR="171450" marT="114300" marB="95250" anchor="ctr">
                     <a:lnR w="0">
                       <a:solidFill>
                         <a:srgbClr val="FFFFFF"/>
@@ -3829,7 +4809,7 @@
                         <a:buNone/>
                       </a:pPr>
                       <a:r>
-                        <a:rPr sz="2400" b="0">
+                        <a:rPr sz="1800" b="0">
                           <a:solidFill>
                             <a:srgbClr val="00355F"/>
                           </a:solidFill>
@@ -3837,11 +4817,27 @@
                           <a:ea typeface="Arial"/>
                           <a:cs typeface="Arial"/>
                         </a:rPr>
-                        <a:t>1</a:t>
+                        <a:t>Funded clinical</a:t>
+                      </a:r>
+                    </a:p>
+                    <a:p>
+                      <a:pPr algn="ctr">
+                        <a:buNone/>
+                      </a:pPr>
+                      <a:r>
+                        <a:rPr sz="1800" b="0">
+                          <a:solidFill>
+                            <a:srgbClr val="00355F"/>
+                          </a:solidFill>
+                          <a:latin typeface="Arial"/>
+                          <a:ea typeface="Arial"/>
+                          <a:cs typeface="Arial"/>
+                        </a:rPr>
+                        <a:t>programs</a:t>
                       </a:r>
                     </a:p>
                   </a:txBody>
-                  <a:tcPr marL="209550" marR="171450" marT="152400" marB="133350" anchor="ctr">
+                  <a:tcPr marL="209550" marR="171450" marT="114300" marB="95250" anchor="ctr">
                     <a:lnR w="0">
                       <a:solidFill>
                         <a:srgbClr val="FFFFFF"/>
@@ -3866,7 +4862,7 @@
                         <a:buNone/>
                       </a:pPr>
                       <a:r>
-                        <a:rPr sz="1875" b="0">
+                        <a:rPr sz="1650" b="0">
                           <a:solidFill>
                             <a:srgbClr val="00355F"/>
                           </a:solidFill>
@@ -3874,7 +4870,7 @@
                           <a:ea typeface="Arial"/>
                           <a:cs typeface="Arial"/>
                         </a:rPr>
-                        <a:t>Patients, ethics, capital and time</a:t>
+                        <a:t>Clinical biology, patients, capital and time remain</a:t>
                       </a:r>
                     </a:p>
                     <a:p>
@@ -3882,7 +4878,7 @@
                         <a:buNone/>
                       </a:pPr>
                       <a:r>
-                        <a:rPr sz="1875" b="0">
+                        <a:rPr sz="1650" b="0">
                           <a:solidFill>
                             <a:srgbClr val="00355F"/>
                           </a:solidFill>
@@ -3890,11 +4886,11 @@
                           <a:ea typeface="Arial"/>
                           <a:cs typeface="Arial"/>
                         </a:rPr>
-                        <a:t>remain hard constraints.</a:t>
+                        <a:t>constraints; discovery gains do not establish clinical gains.</a:t>
                       </a:r>
                     </a:p>
                   </a:txBody>
-                  <a:tcPr marL="209550" marR="171450" marT="152400" marB="133350" anchor="ctr">
+                  <a:tcPr marL="209550" marR="171450" marT="114300" marB="95250" anchor="ctr">
                     <a:lnR w="0">
                       <a:solidFill>
                         <a:srgbClr val="FFFFFF"/>
@@ -3921,7 +4917,7 @@
                         <a:buNone/>
                       </a:pPr>
                       <a:r>
-                        <a:rPr sz="1875" b="0">
+                        <a:rPr sz="1650" b="0">
                           <a:solidFill>
                             <a:srgbClr val="00355F"/>
                           </a:solidFill>
@@ -3929,11 +4925,11 @@
                           <a:ea typeface="Arial"/>
                           <a:cs typeface="Arial"/>
                         </a:rPr>
-                        <a:t>Expected approvals</a:t>
+                        <a:t>Phase I to approval</a:t>
                       </a:r>
                     </a:p>
                   </a:txBody>
-                  <a:tcPr marL="209550" marR="171450" marT="152400" marB="133350" anchor="ctr">
+                  <a:tcPr marL="209550" marR="171450" marT="114300" marB="95250" anchor="ctr">
                     <a:lnL w="0">
                       <a:solidFill>
                         <a:srgbClr val="FFFFFF"/>
@@ -3963,7 +4959,7 @@
                         <a:buNone/>
                       </a:pPr>
                       <a:r>
-                        <a:rPr sz="2400" b="0">
+                        <a:rPr sz="1800" b="0">
                           <a:solidFill>
                             <a:srgbClr val="00355F"/>
                           </a:solidFill>
@@ -3971,11 +4967,27 @@
                           <a:ea typeface="Arial"/>
                           <a:cs typeface="Arial"/>
                         </a:rPr>
-                        <a:t>~0.14</a:t>
+                        <a:t>7.9% / 13.8%</a:t>
+                      </a:r>
+                    </a:p>
+                    <a:p>
+                      <a:pPr algn="ctr">
+                        <a:buNone/>
+                      </a:pPr>
+                      <a:r>
+                        <a:rPr sz="1800" b="0">
+                          <a:solidFill>
+                            <a:srgbClr val="00355F"/>
+                          </a:solidFill>
+                          <a:latin typeface="Arial"/>
+                          <a:ea typeface="Arial"/>
+                          <a:cs typeface="Arial"/>
+                        </a:rPr>
+                        <a:t>(study estimates)</a:t>
                       </a:r>
                     </a:p>
                   </a:txBody>
-                  <a:tcPr marL="209550" marR="171450" marT="152400" marB="133350" anchor="ctr">
+                  <a:tcPr marL="209550" marR="171450" marT="114300" marB="95250" anchor="ctr">
                     <a:lnR w="0">
                       <a:solidFill>
                         <a:srgbClr val="FFFFFF"/>
@@ -4000,7 +5012,7 @@
                         <a:buNone/>
                       </a:pPr>
                       <a:r>
-                        <a:rPr sz="2400" b="0">
+                        <a:rPr sz="1800" b="0">
                           <a:solidFill>
                             <a:srgbClr val="00355F"/>
                           </a:solidFill>
@@ -4008,11 +5020,27 @@
                           <a:ea typeface="Arial"/>
                           <a:cs typeface="Arial"/>
                         </a:rPr>
-                        <a:t>Unknown</a:t>
+                        <a:t>AI advantage</a:t>
+                      </a:r>
+                    </a:p>
+                    <a:p>
+                      <a:pPr algn="ctr">
+                        <a:buNone/>
+                      </a:pPr>
+                      <a:r>
+                        <a:rPr sz="1800" b="0">
+                          <a:solidFill>
+                            <a:srgbClr val="00355F"/>
+                          </a:solidFill>
+                          <a:latin typeface="Arial"/>
+                          <a:ea typeface="Arial"/>
+                          <a:cs typeface="Arial"/>
+                        </a:rPr>
+                        <a:t>unproven</a:t>
                       </a:r>
                     </a:p>
                   </a:txBody>
-                  <a:tcPr marL="209550" marR="171450" marT="152400" marB="133350" anchor="ctr">
+                  <a:tcPr marL="209550" marR="171450" marT="114300" marB="95250" anchor="ctr">
                     <a:lnR w="0">
                       <a:solidFill>
                         <a:srgbClr val="FFFFFF"/>
@@ -4037,7 +5065,7 @@
                         <a:buNone/>
                       </a:pPr>
                       <a:r>
-                        <a:rPr sz="1875" b="0">
+                        <a:rPr sz="1650" b="0">
                           <a:solidFill>
                             <a:srgbClr val="00355F"/>
                           </a:solidFill>
@@ -4045,7 +5073,7 @@
                           <a:ea typeface="Arial"/>
                           <a:cs typeface="Arial"/>
                         </a:rPr>
-                        <a:t>Clinical success must be demonstrated;</a:t>
+                        <a:t>BIO 2011–2020 and Wong 2000–2015 are different</a:t>
                       </a:r>
                     </a:p>
                     <a:p>
@@ -4053,7 +5081,7 @@
                         <a:buNone/>
                       </a:pPr>
                       <a:r>
-                        <a:rPr sz="1875" b="0">
+                        <a:rPr sz="1650" b="0">
                           <a:solidFill>
                             <a:srgbClr val="00355F"/>
                           </a:solidFill>
@@ -4061,11 +5089,11 @@
                           <a:ea typeface="Arial"/>
                           <a:cs typeface="Arial"/>
                         </a:rPr>
-                        <a:t>AI does not establish an approval rate.</a:t>
+                        <a:t>cohorts and methods, not an AI comparison.</a:t>
                       </a:r>
                     </a:p>
                   </a:txBody>
-                  <a:tcPr marL="209550" marR="171450" marT="152400" marB="133350" anchor="ctr">
+                  <a:tcPr marL="209550" marR="171450" marT="114300" marB="95250" anchor="ctr">
                     <a:lnR w="0">
                       <a:solidFill>
                         <a:srgbClr val="FFFFFF"/>
@@ -4091,7 +5119,7 @@
           <p:cNvPr id="6" name="">
             <a:extLst xmlns:a="http://schemas.openxmlformats.org/drawingml/2006/main">
               <a:ext uri="{FF2B5EF4-FFF2-40B4-BE49-F238E27FC236}">
-                <a16:creationId xmlns:a16="http://schemas.microsoft.com/office/drawing/2014/main" id="{64011EEB-299A-47C1-8FF4-126142D98205}"/>
+                <a16:creationId xmlns:a16="http://schemas.microsoft.com/office/drawing/2014/main" id="{73A12EE8-42D0-4DEE-A228-ED379CCD9046}"/>
               </a:ext>
             </a:extLst>
           </p:cNvPr>
@@ -4123,7 +5151,7 @@
           <p:cNvPr id="7" name="">
             <a:extLst xmlns:a="http://schemas.openxmlformats.org/drawingml/2006/main">
               <a:ext uri="{FF2B5EF4-FFF2-40B4-BE49-F238E27FC236}">
-                <a16:creationId xmlns:a16="http://schemas.microsoft.com/office/drawing/2014/main" id="{BC157FC7-4BB6-4157-98B0-674B1B7CB0D8}"/>
+                <a16:creationId xmlns:a16="http://schemas.microsoft.com/office/drawing/2014/main" id="{8E7E274D-E692-44DA-A609-1D38AE615C13}"/>
               </a:ext>
             </a:extLst>
           </p:cNvPr>
@@ -4133,10 +5161,10 @@
           <p:nvPr/>
         </p:nvPicPr>
         <p:blipFill>
-          <a:blip xmlns:r="http://schemas.openxmlformats.org/officeDocument/2006/relationships" xmlns:a="http://schemas.openxmlformats.org/drawingml/2006/main" r:embed="R2d060b1feb2244ed">
+          <a:blip xmlns:r="http://schemas.openxmlformats.org/officeDocument/2006/relationships" xmlns:a="http://schemas.openxmlformats.org/drawingml/2006/main" r:embed="Rc765be0ea93249f0">
             <a:extLst>
               <a:ext uri="{96DAC541-7B7A-43D3-8B79-37D633B846F1}">
-                <asvg:svgBlip xmlns:asvg="http://schemas.microsoft.com/office/drawing/2016/SVG/main" r:embed="R46b5a66a169c4669"/>
+                <asvg:svgBlip xmlns:asvg="http://schemas.microsoft.com/office/drawing/2016/SVG/main" r:embed="Rbf4645a9b85548bd"/>
               </a:ext>
             </a:extLst>
           </a:blip>
@@ -4154,10 +5182,10 @@
       </p:pic>
       <p:sp>
         <p:nvSpPr>
-          <p:cNvPr id="8" name="Working thesis: experimental throughput becomes a capacity gate as virtual design scales.">
+          <p:cNvPr id="8" name="Tool demand depends on funded programs, assay depth, net inputs and prices.">
             <a:extLst xmlns:a="http://schemas.openxmlformats.org/drawingml/2006/main">
               <a:ext uri="{FF2B5EF4-FFF2-40B4-BE49-F238E27FC236}">
-                <a16:creationId xmlns:a16="http://schemas.microsoft.com/office/drawing/2014/main" id="{944DB006-B1D1-47B9-96A5-B98285A3654B}"/>
+                <a16:creationId xmlns:a16="http://schemas.microsoft.com/office/drawing/2014/main" id="{C44C236C-8C2C-4A90-B7C5-1B305C6722A8}"/>
               </a:ext>
             </a:extLst>
           </p:cNvPr>
@@ -4214,17 +5242,17 @@
                 <a:ea typeface="Arial"/>
                 <a:cs typeface="Arial"/>
               </a:rPr>
-              <a:t>Working thesis: experimental throughput becomes a capacity gate as virtual design scales.</a:t>
+              <a:t>Tool demand depends on funded programs, assay depth, net inputs and prices.</a:t>
             </a:r>
           </a:p>
         </p:txBody>
       </p:sp>
       <p:sp>
         <p:nvSpPr>
-          <p:cNvPr id="9" name="Source: user-supplied comparison. ~0.14 is an illustrative expected approval count per clinical entrant; the AI-era outcome is unknown.">
+          <p:cNvPr id="9" name="Sources: Lyu 2019; Sumitomo 2021; BIO 2011–2020; Wong 2000–2015. Workloads are analyst sensitivities, not empirical cohorts.">
             <a:extLst xmlns:a="http://schemas.openxmlformats.org/drawingml/2006/main">
               <a:ext uri="{FF2B5EF4-FFF2-40B4-BE49-F238E27FC236}">
-                <a16:creationId xmlns:a16="http://schemas.microsoft.com/office/drawing/2014/main" id="{D5EE2C6D-F151-4180-B6B5-F1EB133600BB}"/>
+                <a16:creationId xmlns:a16="http://schemas.microsoft.com/office/drawing/2014/main" id="{B2422390-4EC1-4833-BA98-90E0AC54BBAC}"/>
               </a:ext>
             </a:extLst>
           </p:cNvPr>
@@ -4281,7 +5309,7 @@
                 <a:ea typeface="Arial"/>
                 <a:cs typeface="Arial"/>
               </a:rPr>
-              <a:t>Source: user-supplied comparison. ~0.14 is an illustrative expected approval count per clinical entrant; the AI-era outcome is unknown.</a:t>
+              <a:t>Sources: Lyu 2019; Sumitomo 2021; BIO 2011–2020; Wong 2000–2015. Workloads are analyst sensitivities, not empirical cohorts.</a:t>
             </a:r>
           </a:p>
         </p:txBody>
@@ -4289,7 +5317,7 @@
     </p:spTree>
     <p:extLst>
       <p:ext uri="{BB962C8B-B14F-4D97-AF65-F5344CB8AC3E}">
-        <p14:creationId xmlns:p14="http://schemas.microsoft.com/office/powerpoint/2010/main" val="726660515"/>
+        <p14:creationId xmlns:p14="http://schemas.microsoft.com/office/powerpoint/2010/main" val="1392389549"/>
       </p:ext>
     </p:extLst>
   </p:cSld>
